--- a/slides/old/07-storytelling.pptx
+++ b/slides/old/07-storytelling.pptx
@@ -5,41 +5,42 @@
     <p:sldMasterId id="2147483852" r:id="rId1"/>
   </p:sldMasterIdLst>
   <p:notesMasterIdLst>
-    <p:notesMasterId r:id="rId34"/>
+    <p:notesMasterId r:id="rId35"/>
   </p:notesMasterIdLst>
   <p:sldIdLst>
     <p:sldId id="256" r:id="rId2"/>
-    <p:sldId id="257" r:id="rId3"/>
-    <p:sldId id="263" r:id="rId4"/>
-    <p:sldId id="264" r:id="rId5"/>
-    <p:sldId id="265" r:id="rId6"/>
-    <p:sldId id="266" r:id="rId7"/>
-    <p:sldId id="267" r:id="rId8"/>
-    <p:sldId id="268" r:id="rId9"/>
-    <p:sldId id="269" r:id="rId10"/>
-    <p:sldId id="270" r:id="rId11"/>
-    <p:sldId id="271" r:id="rId12"/>
-    <p:sldId id="272" r:id="rId13"/>
-    <p:sldId id="273" r:id="rId14"/>
-    <p:sldId id="293" r:id="rId15"/>
-    <p:sldId id="274" r:id="rId16"/>
-    <p:sldId id="276" r:id="rId17"/>
-    <p:sldId id="277" r:id="rId18"/>
-    <p:sldId id="278" r:id="rId19"/>
-    <p:sldId id="279" r:id="rId20"/>
-    <p:sldId id="280" r:id="rId21"/>
-    <p:sldId id="285" r:id="rId22"/>
-    <p:sldId id="286" r:id="rId23"/>
-    <p:sldId id="289" r:id="rId24"/>
-    <p:sldId id="288" r:id="rId25"/>
-    <p:sldId id="290" r:id="rId26"/>
-    <p:sldId id="291" r:id="rId27"/>
-    <p:sldId id="292" r:id="rId28"/>
-    <p:sldId id="281" r:id="rId29"/>
-    <p:sldId id="282" r:id="rId30"/>
-    <p:sldId id="283" r:id="rId31"/>
-    <p:sldId id="294" r:id="rId32"/>
-    <p:sldId id="284" r:id="rId33"/>
+    <p:sldId id="295" r:id="rId3"/>
+    <p:sldId id="257" r:id="rId4"/>
+    <p:sldId id="263" r:id="rId5"/>
+    <p:sldId id="264" r:id="rId6"/>
+    <p:sldId id="265" r:id="rId7"/>
+    <p:sldId id="266" r:id="rId8"/>
+    <p:sldId id="267" r:id="rId9"/>
+    <p:sldId id="268" r:id="rId10"/>
+    <p:sldId id="269" r:id="rId11"/>
+    <p:sldId id="270" r:id="rId12"/>
+    <p:sldId id="271" r:id="rId13"/>
+    <p:sldId id="272" r:id="rId14"/>
+    <p:sldId id="273" r:id="rId15"/>
+    <p:sldId id="293" r:id="rId16"/>
+    <p:sldId id="274" r:id="rId17"/>
+    <p:sldId id="276" r:id="rId18"/>
+    <p:sldId id="277" r:id="rId19"/>
+    <p:sldId id="278" r:id="rId20"/>
+    <p:sldId id="279" r:id="rId21"/>
+    <p:sldId id="280" r:id="rId22"/>
+    <p:sldId id="285" r:id="rId23"/>
+    <p:sldId id="286" r:id="rId24"/>
+    <p:sldId id="289" r:id="rId25"/>
+    <p:sldId id="288" r:id="rId26"/>
+    <p:sldId id="290" r:id="rId27"/>
+    <p:sldId id="291" r:id="rId28"/>
+    <p:sldId id="292" r:id="rId29"/>
+    <p:sldId id="281" r:id="rId30"/>
+    <p:sldId id="282" r:id="rId31"/>
+    <p:sldId id="283" r:id="rId32"/>
+    <p:sldId id="294" r:id="rId33"/>
+    <p:sldId id="284" r:id="rId34"/>
   </p:sldIdLst>
   <p:sldSz cx="12192000" cy="6858000"/>
   <p:notesSz cx="6858000" cy="9144000"/>
@@ -228,7 +229,7 @@
           <a:p>
             <a:fld id="{3CBB8A52-8AC5-C74C-97FB-632C448F3674}" type="datetimeFigureOut">
               <a:rPr lang="en-US" smtClean="0"/>
-              <a:t>9/25/25</a:t>
+              <a:t>9/10/26</a:t>
             </a:fld>
             <a:endParaRPr lang="en-US"/>
           </a:p>
@@ -765,7 +766,7 @@
                 <a:cs typeface="Calibri"/>
                 <a:sym typeface="Calibri"/>
               </a:rPr>
-              <a:t>12</a:t>
+              <a:t>13</a:t>
             </a:fld>
             <a:endParaRPr sz="1200">
               <a:solidFill>
@@ -1824,7 +1825,7 @@
           <a:p>
             <a:fld id="{E666506D-5C9B-294C-B2AE-15ACE8B5B9F7}" type="slidenum">
               <a:rPr lang="en-US" smtClean="0"/>
-              <a:t>23</a:t>
+              <a:t>24</a:t>
             </a:fld>
             <a:endParaRPr lang="en-US"/>
           </a:p>
@@ -2039,7 +2040,7 @@
           <a:p>
             <a:fld id="{E666506D-5C9B-294C-B2AE-15ACE8B5B9F7}" type="slidenum">
               <a:rPr lang="en-US" smtClean="0"/>
-              <a:t>24</a:t>
+              <a:t>25</a:t>
             </a:fld>
             <a:endParaRPr lang="en-US"/>
           </a:p>
@@ -2150,7 +2151,7 @@
           <a:p>
             <a:fld id="{E666506D-5C9B-294C-B2AE-15ACE8B5B9F7}" type="slidenum">
               <a:rPr lang="en-US" smtClean="0"/>
-              <a:t>25</a:t>
+              <a:t>26</a:t>
             </a:fld>
             <a:endParaRPr lang="en-US"/>
           </a:p>
@@ -2261,7 +2262,7 @@
           <a:p>
             <a:fld id="{E666506D-5C9B-294C-B2AE-15ACE8B5B9F7}" type="slidenum">
               <a:rPr lang="en-US" smtClean="0"/>
-              <a:t>26</a:t>
+              <a:t>27</a:t>
             </a:fld>
             <a:endParaRPr lang="en-US"/>
           </a:p>
@@ -2372,7 +2373,7 @@
           <a:p>
             <a:fld id="{E666506D-5C9B-294C-B2AE-15ACE8B5B9F7}" type="slidenum">
               <a:rPr lang="en-US" smtClean="0"/>
-              <a:t>27</a:t>
+              <a:t>28</a:t>
             </a:fld>
             <a:endParaRPr lang="en-US"/>
           </a:p>
@@ -4205,7 +4206,7 @@
             <a:fld id="{5586B75A-687E-405C-8A0B-8D00578BA2C3}" type="datetimeFigureOut">
               <a:rPr lang="en-US" smtClean="0"/>
               <a:pPr/>
-              <a:t>9/25/25</a:t>
+              <a:t>9/10/26</a:t>
             </a:fld>
             <a:endParaRPr lang="en-US" dirty="0"/>
           </a:p>
@@ -4377,7 +4378,7 @@
             <a:fld id="{5586B75A-687E-405C-8A0B-8D00578BA2C3}" type="datetimeFigureOut">
               <a:rPr lang="en-US" smtClean="0"/>
               <a:pPr/>
-              <a:t>9/25/25</a:t>
+              <a:t>9/10/26</a:t>
             </a:fld>
             <a:endParaRPr lang="en-US" dirty="0"/>
           </a:p>
@@ -4559,7 +4560,7 @@
             <a:fld id="{5586B75A-687E-405C-8A0B-8D00578BA2C3}" type="datetimeFigureOut">
               <a:rPr lang="en-US" smtClean="0"/>
               <a:pPr/>
-              <a:t>9/25/25</a:t>
+              <a:t>9/10/26</a:t>
             </a:fld>
             <a:endParaRPr lang="en-US" dirty="0"/>
           </a:p>
@@ -4731,7 +4732,7 @@
             <a:fld id="{5586B75A-687E-405C-8A0B-8D00578BA2C3}" type="datetimeFigureOut">
               <a:rPr lang="en-US" smtClean="0"/>
               <a:pPr/>
-              <a:t>9/25/25</a:t>
+              <a:t>9/10/26</a:t>
             </a:fld>
             <a:endParaRPr lang="en-US" dirty="0"/>
           </a:p>
@@ -4987,7 +4988,7 @@
             <a:fld id="{5586B75A-687E-405C-8A0B-8D00578BA2C3}" type="datetimeFigureOut">
               <a:rPr lang="en-US" smtClean="0"/>
               <a:pPr/>
-              <a:t>9/25/25</a:t>
+              <a:t>9/10/26</a:t>
             </a:fld>
             <a:endParaRPr lang="en-US" dirty="0"/>
           </a:p>
@@ -5277,7 +5278,7 @@
             <a:fld id="{5586B75A-687E-405C-8A0B-8D00578BA2C3}" type="datetimeFigureOut">
               <a:rPr lang="en-US" smtClean="0"/>
               <a:pPr/>
-              <a:t>9/25/25</a:t>
+              <a:t>9/10/26</a:t>
             </a:fld>
             <a:endParaRPr lang="en-US" dirty="0"/>
           </a:p>
@@ -5721,7 +5722,7 @@
             <a:fld id="{5586B75A-687E-405C-8A0B-8D00578BA2C3}" type="datetimeFigureOut">
               <a:rPr lang="en-US" smtClean="0"/>
               <a:pPr/>
-              <a:t>9/25/25</a:t>
+              <a:t>9/10/26</a:t>
             </a:fld>
             <a:endParaRPr lang="en-US" dirty="0"/>
           </a:p>
@@ -5841,7 +5842,7 @@
             <a:fld id="{5586B75A-687E-405C-8A0B-8D00578BA2C3}" type="datetimeFigureOut">
               <a:rPr lang="en-US" smtClean="0"/>
               <a:pPr/>
-              <a:t>9/25/25</a:t>
+              <a:t>9/10/26</a:t>
             </a:fld>
             <a:endParaRPr lang="en-US" dirty="0"/>
           </a:p>
@@ -5938,7 +5939,7 @@
             <a:fld id="{5586B75A-687E-405C-8A0B-8D00578BA2C3}" type="datetimeFigureOut">
               <a:rPr lang="en-US" smtClean="0"/>
               <a:pPr/>
-              <a:t>9/25/25</a:t>
+              <a:t>9/10/26</a:t>
             </a:fld>
             <a:endParaRPr lang="en-US" dirty="0"/>
           </a:p>
@@ -6228,7 +6229,7 @@
             <a:fld id="{5586B75A-687E-405C-8A0B-8D00578BA2C3}" type="datetimeFigureOut">
               <a:rPr lang="en-US" smtClean="0"/>
               <a:pPr/>
-              <a:t>9/25/25</a:t>
+              <a:t>9/10/26</a:t>
             </a:fld>
             <a:endParaRPr lang="en-US" dirty="0"/>
           </a:p>
@@ -6503,7 +6504,7 @@
             <a:fld id="{5586B75A-687E-405C-8A0B-8D00578BA2C3}" type="datetimeFigureOut">
               <a:rPr lang="en-US" smtClean="0"/>
               <a:pPr/>
-              <a:t>9/25/25</a:t>
+              <a:t>9/10/26</a:t>
             </a:fld>
             <a:endParaRPr lang="en-US" dirty="0"/>
           </a:p>
@@ -6816,7 +6817,7 @@
             <a:fld id="{5586B75A-687E-405C-8A0B-8D00578BA2C3}" type="datetimeFigureOut">
               <a:rPr lang="en-US" smtClean="0"/>
               <a:pPr/>
-              <a:t>9/25/25</a:t>
+              <a:t>9/10/26</a:t>
             </a:fld>
             <a:endParaRPr lang="en-US" dirty="0"/>
           </a:p>
@@ -7421,6 +7422,231 @@
   <p:cSld>
     <p:spTree>
       <p:nvGrpSpPr>
+        <p:cNvPr id="1" name="Shape 199"/>
+        <p:cNvGrpSpPr/>
+        <p:nvPr/>
+      </p:nvGrpSpPr>
+      <p:grpSpPr>
+        <a:xfrm>
+          <a:off x="0" y="0"/>
+          <a:ext cx="0" cy="0"/>
+          <a:chOff x="0" y="0"/>
+          <a:chExt cx="0" cy="0"/>
+        </a:xfrm>
+      </p:grpSpPr>
+      <p:pic>
+        <p:nvPicPr>
+          <p:cNvPr id="200" name="Google Shape;200;p26"/>
+          <p:cNvPicPr preferRelativeResize="0"/>
+          <p:nvPr/>
+        </p:nvPicPr>
+        <p:blipFill rotWithShape="1">
+          <a:blip r:embed="rId3">
+            <a:alphaModFix/>
+          </a:blip>
+          <a:srcRect/>
+          <a:stretch/>
+        </p:blipFill>
+        <p:spPr>
+          <a:xfrm>
+            <a:off x="4446913" y="1706440"/>
+            <a:ext cx="2279613" cy="4279274"/>
+          </a:xfrm>
+          <a:prstGeom prst="rect">
+            <a:avLst/>
+          </a:prstGeom>
+          <a:noFill/>
+          <a:ln>
+            <a:noFill/>
+          </a:ln>
+        </p:spPr>
+      </p:pic>
+      <p:pic>
+        <p:nvPicPr>
+          <p:cNvPr id="201" name="Google Shape;201;p26"/>
+          <p:cNvPicPr preferRelativeResize="0"/>
+          <p:nvPr/>
+        </p:nvPicPr>
+        <p:blipFill rotWithShape="1">
+          <a:blip r:embed="rId4">
+            <a:alphaModFix/>
+          </a:blip>
+          <a:srcRect/>
+          <a:stretch/>
+        </p:blipFill>
+        <p:spPr>
+          <a:xfrm>
+            <a:off x="7655143" y="1503219"/>
+            <a:ext cx="2053254" cy="4724400"/>
+          </a:xfrm>
+          <a:prstGeom prst="rect">
+            <a:avLst/>
+          </a:prstGeom>
+          <a:noFill/>
+          <a:ln>
+            <a:noFill/>
+          </a:ln>
+        </p:spPr>
+      </p:pic>
+      <p:sp>
+        <p:nvSpPr>
+          <p:cNvPr id="202" name="Google Shape;202;p26"/>
+          <p:cNvSpPr/>
+          <p:nvPr/>
+        </p:nvSpPr>
+        <p:spPr>
+          <a:xfrm>
+            <a:off x="4946295" y="281196"/>
+            <a:ext cx="3023809" cy="1320800"/>
+          </a:xfrm>
+          <a:prstGeom prst="wedgeEllipseCallout">
+            <a:avLst>
+              <a:gd name="adj1" fmla="val -17979"/>
+              <a:gd name="adj2" fmla="val 74635"/>
+            </a:avLst>
+          </a:prstGeom>
+          <a:solidFill>
+            <a:schemeClr val="lt1"/>
+          </a:solidFill>
+          <a:ln w="25400" cap="flat" cmpd="sng">
+            <a:solidFill>
+              <a:schemeClr val="dk1"/>
+            </a:solidFill>
+            <a:prstDash val="solid"/>
+            <a:round/>
+            <a:headEnd type="none" w="sm" len="sm"/>
+            <a:tailEnd type="none" w="sm" len="sm"/>
+          </a:ln>
+        </p:spPr>
+        <p:txBody>
+          <a:bodyPr spcFirstLastPara="1" wrap="square" lIns="91425" tIns="91425" rIns="91425" bIns="91425" anchor="ctr" anchorCtr="0">
+            <a:noAutofit/>
+          </a:bodyPr>
+          <a:lstStyle/>
+          <a:p>
+            <a:endParaRPr/>
+          </a:p>
+        </p:txBody>
+      </p:sp>
+      <p:sp>
+        <p:nvSpPr>
+          <p:cNvPr id="203" name="Google Shape;203;p26"/>
+          <p:cNvSpPr txBox="1"/>
+          <p:nvPr/>
+        </p:nvSpPr>
+        <p:spPr>
+          <a:xfrm>
+            <a:off x="5518954" y="526097"/>
+            <a:ext cx="1878489" cy="830997"/>
+          </a:xfrm>
+          <a:prstGeom prst="rect">
+            <a:avLst/>
+          </a:prstGeom>
+          <a:noFill/>
+          <a:ln>
+            <a:noFill/>
+          </a:ln>
+        </p:spPr>
+        <p:txBody>
+          <a:bodyPr spcFirstLastPara="1" wrap="square" lIns="91425" tIns="45700" rIns="91425" bIns="45700" anchor="t" anchorCtr="0">
+            <a:noAutofit/>
+          </a:bodyPr>
+          <a:lstStyle/>
+          <a:p>
+            <a:pPr algn="ctr"/>
+            <a:r>
+              <a:rPr lang="en-US" sz="2400" dirty="0">
+                <a:solidFill>
+                  <a:schemeClr val="tx1">
+                    <a:lumMod val="75000"/>
+                    <a:lumOff val="25000"/>
+                  </a:schemeClr>
+                </a:solidFill>
+                <a:ea typeface="Arial"/>
+                <a:cs typeface="Arial"/>
+                <a:sym typeface="Arial"/>
+              </a:rPr>
+              <a:t>What is that </a:t>
+            </a:r>
+            <a:endParaRPr sz="2400" dirty="0">
+              <a:solidFill>
+                <a:schemeClr val="tx1">
+                  <a:lumMod val="75000"/>
+                  <a:lumOff val="25000"/>
+                </a:schemeClr>
+              </a:solidFill>
+            </a:endParaRPr>
+          </a:p>
+          <a:p>
+            <a:pPr algn="ctr"/>
+            <a:r>
+              <a:rPr lang="en-US" sz="2400" dirty="0">
+                <a:solidFill>
+                  <a:schemeClr val="tx1">
+                    <a:lumMod val="75000"/>
+                    <a:lumOff val="25000"/>
+                  </a:schemeClr>
+                </a:solidFill>
+                <a:ea typeface="Arial"/>
+                <a:cs typeface="Arial"/>
+                <a:sym typeface="Arial"/>
+              </a:rPr>
+              <a:t>story about?</a:t>
+            </a:r>
+            <a:endParaRPr sz="2400" dirty="0">
+              <a:solidFill>
+                <a:schemeClr val="tx1">
+                  <a:lumMod val="75000"/>
+                  <a:lumOff val="25000"/>
+                </a:schemeClr>
+              </a:solidFill>
+              <a:ea typeface="Arial"/>
+              <a:cs typeface="Arial"/>
+              <a:sym typeface="Arial"/>
+            </a:endParaRPr>
+          </a:p>
+        </p:txBody>
+      </p:sp>
+      <p:pic>
+        <p:nvPicPr>
+          <p:cNvPr id="204" name="Google Shape;204;p26"/>
+          <p:cNvPicPr preferRelativeResize="0"/>
+          <p:nvPr/>
+        </p:nvPicPr>
+        <p:blipFill rotWithShape="1">
+          <a:blip r:embed="rId5">
+            <a:alphaModFix/>
+          </a:blip>
+          <a:srcRect/>
+          <a:stretch/>
+        </p:blipFill>
+        <p:spPr>
+          <a:xfrm>
+            <a:off x="9310255" y="2493819"/>
+            <a:ext cx="914400" cy="914400"/>
+          </a:xfrm>
+          <a:prstGeom prst="rect">
+            <a:avLst/>
+          </a:prstGeom>
+          <a:noFill/>
+          <a:ln>
+            <a:noFill/>
+          </a:ln>
+        </p:spPr>
+      </p:pic>
+    </p:spTree>
+  </p:cSld>
+  <p:clrMapOvr>
+    <a:masterClrMapping/>
+  </p:clrMapOvr>
+</p:sld>
+</file>
+
+<file path=ppt/slides/slide11.xml><?xml version="1.0" encoding="utf-8"?>
+<p:sld xmlns:a="http://schemas.openxmlformats.org/drawingml/2006/main" xmlns:r="http://schemas.openxmlformats.org/officeDocument/2006/relationships" xmlns:p="http://schemas.openxmlformats.org/presentationml/2006/main">
+  <p:cSld>
+    <p:spTree>
+      <p:nvGrpSpPr>
         <p:cNvPr id="1" name="Shape 208"/>
         <p:cNvGrpSpPr/>
         <p:nvPr/>
@@ -7778,7 +8004,7 @@
 </p:sld>
 </file>
 
-<file path=ppt/slides/slide11.xml><?xml version="1.0" encoding="utf-8"?>
+<file path=ppt/slides/slide12.xml><?xml version="1.0" encoding="utf-8"?>
 <p:sld xmlns:a="http://schemas.openxmlformats.org/drawingml/2006/main" xmlns:r="http://schemas.openxmlformats.org/officeDocument/2006/relationships" xmlns:p="http://schemas.openxmlformats.org/presentationml/2006/main">
   <p:cSld>
     <p:spTree>
@@ -8482,7 +8708,7 @@
 </p:sld>
 </file>
 
-<file path=ppt/slides/slide12.xml><?xml version="1.0" encoding="utf-8"?>
+<file path=ppt/slides/slide13.xml><?xml version="1.0" encoding="utf-8"?>
 <p:sld xmlns:a="http://schemas.openxmlformats.org/drawingml/2006/main" xmlns:r="http://schemas.openxmlformats.org/officeDocument/2006/relationships" xmlns:p="http://schemas.openxmlformats.org/presentationml/2006/main">
   <p:cSld>
     <p:spTree>
@@ -10513,7 +10739,7 @@
 </p:sld>
 </file>
 
-<file path=ppt/slides/slide13.xml><?xml version="1.0" encoding="utf-8"?>
+<file path=ppt/slides/slide14.xml><?xml version="1.0" encoding="utf-8"?>
 <p:sld xmlns:a="http://schemas.openxmlformats.org/drawingml/2006/main" xmlns:r="http://schemas.openxmlformats.org/officeDocument/2006/relationships" xmlns:p="http://schemas.openxmlformats.org/presentationml/2006/main">
   <p:cSld>
     <p:spTree>
@@ -10623,7 +10849,7 @@
 </p:sld>
 </file>
 
-<file path=ppt/slides/slide14.xml><?xml version="1.0" encoding="utf-8"?>
+<file path=ppt/slides/slide15.xml><?xml version="1.0" encoding="utf-8"?>
 <p:sld xmlns:a="http://schemas.openxmlformats.org/drawingml/2006/main" xmlns:r="http://schemas.openxmlformats.org/officeDocument/2006/relationships" xmlns:p="http://schemas.openxmlformats.org/presentationml/2006/main">
   <p:cSld>
     <p:spTree>
@@ -10772,7 +10998,7 @@
 </p:sld>
 </file>
 
-<file path=ppt/slides/slide15.xml><?xml version="1.0" encoding="utf-8"?>
+<file path=ppt/slides/slide16.xml><?xml version="1.0" encoding="utf-8"?>
 <p:sld xmlns:a="http://schemas.openxmlformats.org/drawingml/2006/main" xmlns:r="http://schemas.openxmlformats.org/officeDocument/2006/relationships" xmlns:p="http://schemas.openxmlformats.org/presentationml/2006/main" show="0">
   <p:cSld>
     <p:spTree>
@@ -10909,7 +11135,7 @@
 </p:sld>
 </file>
 
-<file path=ppt/slides/slide16.xml><?xml version="1.0" encoding="utf-8"?>
+<file path=ppt/slides/slide17.xml><?xml version="1.0" encoding="utf-8"?>
 <p:sld xmlns:a="http://schemas.openxmlformats.org/drawingml/2006/main" xmlns:r="http://schemas.openxmlformats.org/officeDocument/2006/relationships" xmlns:p="http://schemas.openxmlformats.org/presentationml/2006/main" show="0">
   <p:cSld>
     <p:spTree>
@@ -11083,7 +11309,7 @@
 </p:sld>
 </file>
 
-<file path=ppt/slides/slide17.xml><?xml version="1.0" encoding="utf-8"?>
+<file path=ppt/slides/slide18.xml><?xml version="1.0" encoding="utf-8"?>
 <p:sld xmlns:a="http://schemas.openxmlformats.org/drawingml/2006/main" xmlns:r="http://schemas.openxmlformats.org/officeDocument/2006/relationships" xmlns:p="http://schemas.openxmlformats.org/presentationml/2006/main">
   <p:cSld>
     <p:spTree>
@@ -13590,7 +13816,7 @@
 </p:sld>
 </file>
 
-<file path=ppt/slides/slide18.xml><?xml version="1.0" encoding="utf-8"?>
+<file path=ppt/slides/slide19.xml><?xml version="1.0" encoding="utf-8"?>
 <p:sld xmlns:a="http://schemas.openxmlformats.org/drawingml/2006/main" xmlns:r="http://schemas.openxmlformats.org/officeDocument/2006/relationships" xmlns:p="http://schemas.openxmlformats.org/presentationml/2006/main">
   <p:cSld>
     <p:spTree>
@@ -13700,7 +13926,90 @@
 </p:sld>
 </file>
 
-<file path=ppt/slides/slide19.xml><?xml version="1.0" encoding="utf-8"?>
+<file path=ppt/slides/slide2.xml><?xml version="1.0" encoding="utf-8"?>
+<p:sld xmlns:a="http://schemas.openxmlformats.org/drawingml/2006/main" xmlns:r="http://schemas.openxmlformats.org/officeDocument/2006/relationships" xmlns:p="http://schemas.openxmlformats.org/presentationml/2006/main">
+  <p:cSld>
+    <p:spTree>
+      <p:nvGrpSpPr>
+        <p:cNvPr id="1" name=""/>
+        <p:cNvGrpSpPr/>
+        <p:nvPr/>
+      </p:nvGrpSpPr>
+      <p:grpSpPr>
+        <a:xfrm>
+          <a:off x="0" y="0"/>
+          <a:ext cx="0" cy="0"/>
+          <a:chOff x="0" y="0"/>
+          <a:chExt cx="0" cy="0"/>
+        </a:xfrm>
+      </p:grpSpPr>
+      <p:sp>
+        <p:nvSpPr>
+          <p:cNvPr id="2" name="Title 1">
+            <a:extLst>
+              <a:ext uri="{FF2B5EF4-FFF2-40B4-BE49-F238E27FC236}">
+                <a16:creationId xmlns:a16="http://schemas.microsoft.com/office/drawing/2014/main" id="{4F2BEF4F-181F-C70B-4AB4-08E7CA652480}"/>
+              </a:ext>
+            </a:extLst>
+          </p:cNvPr>
+          <p:cNvSpPr>
+            <a:spLocks noGrp="1"/>
+          </p:cNvSpPr>
+          <p:nvPr>
+            <p:ph type="title"/>
+          </p:nvPr>
+        </p:nvSpPr>
+        <p:spPr/>
+        <p:txBody>
+          <a:bodyPr/>
+          <a:lstStyle/>
+          <a:p>
+            <a:r>
+              <a:rPr lang="en-US"/>
+              <a:t>ADD EXAMPLES FROM AMPLIFY PANELISTS</a:t>
+            </a:r>
+          </a:p>
+        </p:txBody>
+      </p:sp>
+      <p:sp>
+        <p:nvSpPr>
+          <p:cNvPr id="3" name="Text Placeholder 2">
+            <a:extLst>
+              <a:ext uri="{FF2B5EF4-FFF2-40B4-BE49-F238E27FC236}">
+                <a16:creationId xmlns:a16="http://schemas.microsoft.com/office/drawing/2014/main" id="{181085DC-81FF-5EF7-EAE6-EC300D4AD804}"/>
+              </a:ext>
+            </a:extLst>
+          </p:cNvPr>
+          <p:cNvSpPr>
+            <a:spLocks noGrp="1"/>
+          </p:cNvSpPr>
+          <p:nvPr>
+            <p:ph type="body" idx="1"/>
+          </p:nvPr>
+        </p:nvSpPr>
+        <p:spPr/>
+        <p:txBody>
+          <a:bodyPr/>
+          <a:lstStyle/>
+          <a:p>
+            <a:endParaRPr lang="en-US"/>
+          </a:p>
+        </p:txBody>
+      </p:sp>
+    </p:spTree>
+    <p:extLst>
+      <p:ext uri="{BB962C8B-B14F-4D97-AF65-F5344CB8AC3E}">
+        <p14:creationId xmlns:p14="http://schemas.microsoft.com/office/powerpoint/2010/main" val="3450944026"/>
+      </p:ext>
+    </p:extLst>
+  </p:cSld>
+  <p:clrMapOvr>
+    <a:masterClrMapping/>
+  </p:clrMapOvr>
+</p:sld>
+</file>
+
+<file path=ppt/slides/slide20.xml><?xml version="1.0" encoding="utf-8"?>
 <p:sld xmlns:a="http://schemas.openxmlformats.org/drawingml/2006/main" xmlns:r="http://schemas.openxmlformats.org/officeDocument/2006/relationships" xmlns:p="http://schemas.openxmlformats.org/presentationml/2006/main">
   <p:cSld>
     <p:spTree>
@@ -13973,176 +14282,7 @@
 </p:sld>
 </file>
 
-<file path=ppt/slides/slide2.xml><?xml version="1.0" encoding="utf-8"?>
-<p:sld xmlns:a="http://schemas.openxmlformats.org/drawingml/2006/main" xmlns:r="http://schemas.openxmlformats.org/officeDocument/2006/relationships" xmlns:p="http://schemas.openxmlformats.org/presentationml/2006/main">
-  <p:cSld>
-    <p:spTree>
-      <p:nvGrpSpPr>
-        <p:cNvPr id="1" name=""/>
-        <p:cNvGrpSpPr/>
-        <p:nvPr/>
-      </p:nvGrpSpPr>
-      <p:grpSpPr>
-        <a:xfrm>
-          <a:off x="0" y="0"/>
-          <a:ext cx="0" cy="0"/>
-          <a:chOff x="0" y="0"/>
-          <a:chExt cx="0" cy="0"/>
-        </a:xfrm>
-      </p:grpSpPr>
-      <p:sp>
-        <p:nvSpPr>
-          <p:cNvPr id="2" name="Title 1">
-            <a:extLst>
-              <a:ext uri="{FF2B5EF4-FFF2-40B4-BE49-F238E27FC236}">
-                <a16:creationId xmlns:a16="http://schemas.microsoft.com/office/drawing/2014/main" id="{10D330C2-52A4-1ABA-980B-56FBC97F350C}"/>
-              </a:ext>
-            </a:extLst>
-          </p:cNvPr>
-          <p:cNvSpPr>
-            <a:spLocks noGrp="1"/>
-          </p:cNvSpPr>
-          <p:nvPr>
-            <p:ph type="title"/>
-          </p:nvPr>
-        </p:nvSpPr>
-        <p:spPr/>
-        <p:txBody>
-          <a:bodyPr/>
-          <a:lstStyle/>
-          <a:p>
-            <a:r>
-              <a:rPr lang="en-US" dirty="0"/>
-              <a:t>Plan for Today</a:t>
-            </a:r>
-          </a:p>
-        </p:txBody>
-      </p:sp>
-      <p:sp>
-        <p:nvSpPr>
-          <p:cNvPr id="3" name="Content Placeholder 2">
-            <a:extLst>
-              <a:ext uri="{FF2B5EF4-FFF2-40B4-BE49-F238E27FC236}">
-                <a16:creationId xmlns:a16="http://schemas.microsoft.com/office/drawing/2014/main" id="{9EAE50F6-429C-715A-C25C-1C7744AED1CF}"/>
-              </a:ext>
-            </a:extLst>
-          </p:cNvPr>
-          <p:cNvSpPr>
-            <a:spLocks noGrp="1"/>
-          </p:cNvSpPr>
-          <p:nvPr>
-            <p:ph idx="1"/>
-          </p:nvPr>
-        </p:nvSpPr>
-        <p:spPr/>
-        <p:txBody>
-          <a:bodyPr>
-            <a:normAutofit/>
-          </a:bodyPr>
-          <a:lstStyle/>
-          <a:p>
-            <a:pPr marL="182880" marR="0" lvl="0" indent="-182880" algn="l" defTabSz="914400" rtl="0" eaLnBrk="1" fontAlgn="auto" latinLnBrk="0" hangingPunct="1">
-              <a:lnSpc>
-                <a:spcPct val="100000"/>
-              </a:lnSpc>
-              <a:spcBef>
-                <a:spcPts val="0"/>
-              </a:spcBef>
-              <a:spcAft>
-                <a:spcPts val="0"/>
-              </a:spcAft>
-              <a:buClr>
-                <a:srgbClr val="93A299"/>
-              </a:buClr>
-              <a:buSzPts val="2040"/>
-              <a:buFont typeface="Arial"/>
-              <a:buChar char="•"/>
-              <a:tabLst/>
-              <a:defRPr/>
-            </a:pPr>
-            <a:r>
-              <a:rPr lang="en-US" sz="2400" kern="0" dirty="0">
-                <a:ea typeface="Arial"/>
-                <a:cs typeface="Arial"/>
-                <a:sym typeface="Arial"/>
-              </a:rPr>
-              <a:t>Narrative structures</a:t>
-            </a:r>
-          </a:p>
-          <a:p>
-            <a:pPr marL="182880" marR="0" lvl="0" indent="-182880" algn="l" defTabSz="914400" rtl="0" eaLnBrk="1" fontAlgn="auto" latinLnBrk="0" hangingPunct="1">
-              <a:lnSpc>
-                <a:spcPct val="100000"/>
-              </a:lnSpc>
-              <a:spcBef>
-                <a:spcPts val="0"/>
-              </a:spcBef>
-              <a:spcAft>
-                <a:spcPts val="0"/>
-              </a:spcAft>
-              <a:buClr>
-                <a:srgbClr val="93A299"/>
-              </a:buClr>
-              <a:buSzPts val="2040"/>
-              <a:buFont typeface="Arial"/>
-              <a:buChar char="•"/>
-              <a:tabLst/>
-              <a:defRPr/>
-            </a:pPr>
-            <a:r>
-              <a:rPr lang="en-US" sz="2400" kern="0" dirty="0">
-                <a:ea typeface="Arial"/>
-                <a:cs typeface="Arial"/>
-                <a:sym typeface="Arial"/>
-              </a:rPr>
-              <a:t>Narrative structures in visualization</a:t>
-            </a:r>
-          </a:p>
-          <a:p>
-            <a:pPr marL="182880" marR="0" lvl="0" indent="-182880" algn="l" defTabSz="914400" rtl="0" eaLnBrk="1" fontAlgn="auto" latinLnBrk="0" hangingPunct="1">
-              <a:lnSpc>
-                <a:spcPct val="100000"/>
-              </a:lnSpc>
-              <a:spcBef>
-                <a:spcPts val="0"/>
-              </a:spcBef>
-              <a:spcAft>
-                <a:spcPts val="0"/>
-              </a:spcAft>
-              <a:buClr>
-                <a:srgbClr val="93A299"/>
-              </a:buClr>
-              <a:buSzPts val="2040"/>
-              <a:buFont typeface="Arial"/>
-              <a:buChar char="•"/>
-              <a:tabLst/>
-              <a:defRPr/>
-            </a:pPr>
-            <a:r>
-              <a:rPr lang="en-US" sz="2400" kern="0" dirty="0">
-                <a:ea typeface="Arial"/>
-                <a:cs typeface="Arial"/>
-                <a:sym typeface="Arial"/>
-              </a:rPr>
-              <a:t>Roles of the reader and the author </a:t>
-            </a:r>
-          </a:p>
-        </p:txBody>
-      </p:sp>
-    </p:spTree>
-    <p:extLst>
-      <p:ext uri="{BB962C8B-B14F-4D97-AF65-F5344CB8AC3E}">
-        <p14:creationId xmlns:p14="http://schemas.microsoft.com/office/powerpoint/2010/main" val="1085546165"/>
-      </p:ext>
-    </p:extLst>
-  </p:cSld>
-  <p:clrMapOvr>
-    <a:masterClrMapping/>
-  </p:clrMapOvr>
-</p:sld>
-</file>
-
-<file path=ppt/slides/slide20.xml><?xml version="1.0" encoding="utf-8"?>
+<file path=ppt/slides/slide21.xml><?xml version="1.0" encoding="utf-8"?>
 <p:sld xmlns:a="http://schemas.openxmlformats.org/drawingml/2006/main" xmlns:r="http://schemas.openxmlformats.org/officeDocument/2006/relationships" xmlns:p="http://schemas.openxmlformats.org/presentationml/2006/main">
   <p:cSld>
     <p:spTree>
@@ -14314,7 +14454,7 @@
 </p:sld>
 </file>
 
-<file path=ppt/slides/slide21.xml><?xml version="1.0" encoding="utf-8"?>
+<file path=ppt/slides/slide22.xml><?xml version="1.0" encoding="utf-8"?>
 <p:sld xmlns:a="http://schemas.openxmlformats.org/drawingml/2006/main" xmlns:r="http://schemas.openxmlformats.org/officeDocument/2006/relationships" xmlns:p="http://schemas.openxmlformats.org/presentationml/2006/main">
   <p:cSld>
     <p:spTree>
@@ -14426,7 +14566,7 @@
 </p:sld>
 </file>
 
-<file path=ppt/slides/slide22.xml><?xml version="1.0" encoding="utf-8"?>
+<file path=ppt/slides/slide23.xml><?xml version="1.0" encoding="utf-8"?>
 <p:sld xmlns:a="http://schemas.openxmlformats.org/drawingml/2006/main" xmlns:r="http://schemas.openxmlformats.org/officeDocument/2006/relationships" xmlns:p="http://schemas.openxmlformats.org/presentationml/2006/main">
   <p:cSld>
     <p:spTree>
@@ -14565,7 +14705,7 @@
 </p:sld>
 </file>
 
-<file path=ppt/slides/slide23.xml><?xml version="1.0" encoding="utf-8"?>
+<file path=ppt/slides/slide24.xml><?xml version="1.0" encoding="utf-8"?>
 <p:sld xmlns:a="http://schemas.openxmlformats.org/drawingml/2006/main" xmlns:r="http://schemas.openxmlformats.org/officeDocument/2006/relationships" xmlns:p="http://schemas.openxmlformats.org/presentationml/2006/main">
   <p:cSld>
     <p:spTree>
@@ -14603,10 +14743,10 @@
           <p:nvPr/>
         </p:nvPicPr>
         <p:blipFill>
-          <a:blip r:embed="rId3">
+          <a:blip>
             <a:extLst>
               <a:ext uri="{96DAC541-7B7A-43D3-8B79-37D633B846F1}">
-                <asvg:svgBlip xmlns:asvg="http://schemas.microsoft.com/office/drawing/2016/SVG/main" r:embed="rId4"/>
+                <asvg:svgBlip xmlns:asvg="http://schemas.microsoft.com/office/drawing/2016/SVG/main" r:embed="rId3"/>
               </a:ext>
             </a:extLst>
           </a:blip>
@@ -14780,10 +14920,10 @@
           <p:nvPr/>
         </p:nvPicPr>
         <p:blipFill>
-          <a:blip r:embed="rId5">
+          <a:blip>
             <a:extLst>
               <a:ext uri="{96DAC541-7B7A-43D3-8B79-37D633B846F1}">
-                <asvg:svgBlip xmlns:asvg="http://schemas.microsoft.com/office/drawing/2016/SVG/main" r:embed="rId6"/>
+                <asvg:svgBlip xmlns:asvg="http://schemas.microsoft.com/office/drawing/2016/SVG/main" r:embed="rId4"/>
               </a:ext>
             </a:extLst>
           </a:blip>
@@ -14816,10 +14956,10 @@
           <p:nvPr/>
         </p:nvPicPr>
         <p:blipFill>
-          <a:blip r:embed="rId7">
+          <a:blip>
             <a:extLst>
               <a:ext uri="{96DAC541-7B7A-43D3-8B79-37D633B846F1}">
-                <asvg:svgBlip xmlns:asvg="http://schemas.microsoft.com/office/drawing/2016/SVG/main" r:embed="rId8"/>
+                <asvg:svgBlip xmlns:asvg="http://schemas.microsoft.com/office/drawing/2016/SVG/main" r:embed="rId5"/>
               </a:ext>
             </a:extLst>
           </a:blip>
@@ -14852,10 +14992,10 @@
           <p:nvPr/>
         </p:nvPicPr>
         <p:blipFill>
-          <a:blip r:embed="rId9">
+          <a:blip>
             <a:extLst>
               <a:ext uri="{96DAC541-7B7A-43D3-8B79-37D633B846F1}">
-                <asvg:svgBlip xmlns:asvg="http://schemas.microsoft.com/office/drawing/2016/SVG/main" r:embed="rId10"/>
+                <asvg:svgBlip xmlns:asvg="http://schemas.microsoft.com/office/drawing/2016/SVG/main" r:embed="rId6"/>
               </a:ext>
             </a:extLst>
           </a:blip>
@@ -14888,10 +15028,10 @@
           <p:nvPr/>
         </p:nvPicPr>
         <p:blipFill>
-          <a:blip r:embed="rId3">
+          <a:blip>
             <a:extLst>
               <a:ext uri="{96DAC541-7B7A-43D3-8B79-37D633B846F1}">
-                <asvg:svgBlip xmlns:asvg="http://schemas.microsoft.com/office/drawing/2016/SVG/main" r:embed="rId4"/>
+                <asvg:svgBlip xmlns:asvg="http://schemas.microsoft.com/office/drawing/2016/SVG/main" r:embed="rId3"/>
               </a:ext>
             </a:extLst>
           </a:blip>
@@ -14924,10 +15064,10 @@
           <p:nvPr/>
         </p:nvPicPr>
         <p:blipFill>
-          <a:blip r:embed="rId11">
+          <a:blip>
             <a:extLst>
               <a:ext uri="{96DAC541-7B7A-43D3-8B79-37D633B846F1}">
-                <asvg:svgBlip xmlns:asvg="http://schemas.microsoft.com/office/drawing/2016/SVG/main" r:embed="rId12"/>
+                <asvg:svgBlip xmlns:asvg="http://schemas.microsoft.com/office/drawing/2016/SVG/main" r:embed="rId7"/>
               </a:ext>
             </a:extLst>
           </a:blip>
@@ -14958,7 +15098,7 @@
 </p:sld>
 </file>
 
-<file path=ppt/slides/slide24.xml><?xml version="1.0" encoding="utf-8"?>
+<file path=ppt/slides/slide25.xml><?xml version="1.0" encoding="utf-8"?>
 <p:sld xmlns:a="http://schemas.openxmlformats.org/drawingml/2006/main" xmlns:r="http://schemas.openxmlformats.org/officeDocument/2006/relationships" xmlns:p="http://schemas.openxmlformats.org/presentationml/2006/main">
   <p:cSld>
     <p:spTree>
@@ -15594,7 +15734,7 @@
 </p:sld>
 </file>
 
-<file path=ppt/slides/slide25.xml><?xml version="1.0" encoding="utf-8"?>
+<file path=ppt/slides/slide26.xml><?xml version="1.0" encoding="utf-8"?>
 <p:sld xmlns:a="http://schemas.openxmlformats.org/drawingml/2006/main" xmlns:r="http://schemas.openxmlformats.org/officeDocument/2006/relationships" xmlns:p="http://schemas.openxmlformats.org/presentationml/2006/main">
   <p:cSld>
     <p:spTree>
@@ -15707,10 +15847,10 @@
           <p:nvPr/>
         </p:nvPicPr>
         <p:blipFill>
-          <a:blip r:embed="rId3">
+          <a:blip>
             <a:extLst>
               <a:ext uri="{96DAC541-7B7A-43D3-8B79-37D633B846F1}">
-                <asvg:svgBlip xmlns:asvg="http://schemas.microsoft.com/office/drawing/2016/SVG/main" r:embed="rId4"/>
+                <asvg:svgBlip xmlns:asvg="http://schemas.microsoft.com/office/drawing/2016/SVG/main" r:embed="rId3"/>
               </a:ext>
             </a:extLst>
           </a:blip>
@@ -15743,10 +15883,10 @@
           <p:nvPr/>
         </p:nvPicPr>
         <p:blipFill>
-          <a:blip r:embed="rId5">
+          <a:blip>
             <a:extLst>
               <a:ext uri="{96DAC541-7B7A-43D3-8B79-37D633B846F1}">
-                <asvg:svgBlip xmlns:asvg="http://schemas.microsoft.com/office/drawing/2016/SVG/main" r:embed="rId6"/>
+                <asvg:svgBlip xmlns:asvg="http://schemas.microsoft.com/office/drawing/2016/SVG/main" r:embed="rId4"/>
               </a:ext>
             </a:extLst>
           </a:blip>
@@ -15777,7 +15917,7 @@
 </p:sld>
 </file>
 
-<file path=ppt/slides/slide26.xml><?xml version="1.0" encoding="utf-8"?>
+<file path=ppt/slides/slide27.xml><?xml version="1.0" encoding="utf-8"?>
 <p:sld xmlns:a="http://schemas.openxmlformats.org/drawingml/2006/main" xmlns:r="http://schemas.openxmlformats.org/officeDocument/2006/relationships" xmlns:p="http://schemas.openxmlformats.org/presentationml/2006/main">
   <p:cSld>
     <p:spTree>
@@ -15890,10 +16030,10 @@
           <p:nvPr/>
         </p:nvPicPr>
         <p:blipFill>
-          <a:blip r:embed="rId3">
+          <a:blip>
             <a:extLst>
               <a:ext uri="{96DAC541-7B7A-43D3-8B79-37D633B846F1}">
-                <asvg:svgBlip xmlns:asvg="http://schemas.microsoft.com/office/drawing/2016/SVG/main" r:embed="rId4"/>
+                <asvg:svgBlip xmlns:asvg="http://schemas.microsoft.com/office/drawing/2016/SVG/main" r:embed="rId3"/>
               </a:ext>
             </a:extLst>
           </a:blip>
@@ -15926,10 +16066,10 @@
           <p:nvPr/>
         </p:nvPicPr>
         <p:blipFill>
-          <a:blip r:embed="rId3">
+          <a:blip>
             <a:extLst>
               <a:ext uri="{96DAC541-7B7A-43D3-8B79-37D633B846F1}">
-                <asvg:svgBlip xmlns:asvg="http://schemas.microsoft.com/office/drawing/2016/SVG/main" r:embed="rId4"/>
+                <asvg:svgBlip xmlns:asvg="http://schemas.microsoft.com/office/drawing/2016/SVG/main" r:embed="rId3"/>
               </a:ext>
             </a:extLst>
           </a:blip>
@@ -15962,10 +16102,10 @@
           <p:nvPr/>
         </p:nvPicPr>
         <p:blipFill>
-          <a:blip r:embed="rId3">
+          <a:blip>
             <a:extLst>
               <a:ext uri="{96DAC541-7B7A-43D3-8B79-37D633B846F1}">
-                <asvg:svgBlip xmlns:asvg="http://schemas.microsoft.com/office/drawing/2016/SVG/main" r:embed="rId4"/>
+                <asvg:svgBlip xmlns:asvg="http://schemas.microsoft.com/office/drawing/2016/SVG/main" r:embed="rId3"/>
               </a:ext>
             </a:extLst>
           </a:blip>
@@ -15998,10 +16138,10 @@
           <p:nvPr/>
         </p:nvPicPr>
         <p:blipFill>
-          <a:blip r:embed="rId5">
+          <a:blip>
             <a:extLst>
               <a:ext uri="{96DAC541-7B7A-43D3-8B79-37D633B846F1}">
-                <asvg:svgBlip xmlns:asvg="http://schemas.microsoft.com/office/drawing/2016/SVG/main" r:embed="rId6"/>
+                <asvg:svgBlip xmlns:asvg="http://schemas.microsoft.com/office/drawing/2016/SVG/main" r:embed="rId4"/>
               </a:ext>
             </a:extLst>
           </a:blip>
@@ -16034,10 +16174,10 @@
           <p:nvPr/>
         </p:nvPicPr>
         <p:blipFill>
-          <a:blip r:embed="rId5">
+          <a:blip>
             <a:extLst>
               <a:ext uri="{96DAC541-7B7A-43D3-8B79-37D633B846F1}">
-                <asvg:svgBlip xmlns:asvg="http://schemas.microsoft.com/office/drawing/2016/SVG/main" r:embed="rId6"/>
+                <asvg:svgBlip xmlns:asvg="http://schemas.microsoft.com/office/drawing/2016/SVG/main" r:embed="rId4"/>
               </a:ext>
             </a:extLst>
           </a:blip>
@@ -16070,10 +16210,10 @@
           <p:nvPr/>
         </p:nvPicPr>
         <p:blipFill>
-          <a:blip r:embed="rId5">
+          <a:blip>
             <a:extLst>
               <a:ext uri="{96DAC541-7B7A-43D3-8B79-37D633B846F1}">
-                <asvg:svgBlip xmlns:asvg="http://schemas.microsoft.com/office/drawing/2016/SVG/main" r:embed="rId6"/>
+                <asvg:svgBlip xmlns:asvg="http://schemas.microsoft.com/office/drawing/2016/SVG/main" r:embed="rId4"/>
               </a:ext>
             </a:extLst>
           </a:blip>
@@ -16106,10 +16246,10 @@
           <p:nvPr/>
         </p:nvPicPr>
         <p:blipFill>
-          <a:blip r:embed="rId7">
+          <a:blip>
             <a:extLst>
               <a:ext uri="{96DAC541-7B7A-43D3-8B79-37D633B846F1}">
-                <asvg:svgBlip xmlns:asvg="http://schemas.microsoft.com/office/drawing/2016/SVG/main" r:embed="rId8"/>
+                <asvg:svgBlip xmlns:asvg="http://schemas.microsoft.com/office/drawing/2016/SVG/main" r:embed="rId5"/>
               </a:ext>
             </a:extLst>
           </a:blip>
@@ -16142,10 +16282,10 @@
           <p:nvPr/>
         </p:nvPicPr>
         <p:blipFill>
-          <a:blip r:embed="rId7">
+          <a:blip>
             <a:extLst>
               <a:ext uri="{96DAC541-7B7A-43D3-8B79-37D633B846F1}">
-                <asvg:svgBlip xmlns:asvg="http://schemas.microsoft.com/office/drawing/2016/SVG/main" r:embed="rId8"/>
+                <asvg:svgBlip xmlns:asvg="http://schemas.microsoft.com/office/drawing/2016/SVG/main" r:embed="rId5"/>
               </a:ext>
             </a:extLst>
           </a:blip>
@@ -16176,7 +16316,7 @@
 </p:sld>
 </file>
 
-<file path=ppt/slides/slide27.xml><?xml version="1.0" encoding="utf-8"?>
+<file path=ppt/slides/slide28.xml><?xml version="1.0" encoding="utf-8"?>
 <p:sld xmlns:a="http://schemas.openxmlformats.org/drawingml/2006/main" xmlns:r="http://schemas.openxmlformats.org/officeDocument/2006/relationships" xmlns:p="http://schemas.openxmlformats.org/presentationml/2006/main">
   <p:cSld>
     <p:spTree>
@@ -16289,10 +16429,10 @@
           <p:nvPr/>
         </p:nvPicPr>
         <p:blipFill>
-          <a:blip r:embed="rId3">
+          <a:blip>
             <a:extLst>
               <a:ext uri="{96DAC541-7B7A-43D3-8B79-37D633B846F1}">
-                <asvg:svgBlip xmlns:asvg="http://schemas.microsoft.com/office/drawing/2016/SVG/main" r:embed="rId4"/>
+                <asvg:svgBlip xmlns:asvg="http://schemas.microsoft.com/office/drawing/2016/SVG/main" r:embed="rId3"/>
               </a:ext>
             </a:extLst>
           </a:blip>
@@ -16325,10 +16465,10 @@
           <p:nvPr/>
         </p:nvPicPr>
         <p:blipFill>
-          <a:blip r:embed="rId5">
+          <a:blip>
             <a:extLst>
               <a:ext uri="{96DAC541-7B7A-43D3-8B79-37D633B846F1}">
-                <asvg:svgBlip xmlns:asvg="http://schemas.microsoft.com/office/drawing/2016/SVG/main" r:embed="rId6"/>
+                <asvg:svgBlip xmlns:asvg="http://schemas.microsoft.com/office/drawing/2016/SVG/main" r:embed="rId4"/>
               </a:ext>
             </a:extLst>
           </a:blip>
@@ -16361,10 +16501,10 @@
           <p:nvPr/>
         </p:nvPicPr>
         <p:blipFill>
-          <a:blip r:embed="rId7">
+          <a:blip>
             <a:extLst>
               <a:ext uri="{96DAC541-7B7A-43D3-8B79-37D633B846F1}">
-                <asvg:svgBlip xmlns:asvg="http://schemas.microsoft.com/office/drawing/2016/SVG/main" r:embed="rId8"/>
+                <asvg:svgBlip xmlns:asvg="http://schemas.microsoft.com/office/drawing/2016/SVG/main" r:embed="rId5"/>
               </a:ext>
             </a:extLst>
           </a:blip>
@@ -16397,10 +16537,10 @@
           <p:nvPr/>
         </p:nvPicPr>
         <p:blipFill>
-          <a:blip r:embed="rId9">
+          <a:blip>
             <a:extLst>
               <a:ext uri="{96DAC541-7B7A-43D3-8B79-37D633B846F1}">
-                <asvg:svgBlip xmlns:asvg="http://schemas.microsoft.com/office/drawing/2016/SVG/main" r:embed="rId10"/>
+                <asvg:svgBlip xmlns:asvg="http://schemas.microsoft.com/office/drawing/2016/SVG/main" r:embed="rId6"/>
               </a:ext>
             </a:extLst>
           </a:blip>
@@ -16433,10 +16573,10 @@
           <p:nvPr/>
         </p:nvPicPr>
         <p:blipFill>
-          <a:blip r:embed="rId11">
+          <a:blip>
             <a:extLst>
               <a:ext uri="{96DAC541-7B7A-43D3-8B79-37D633B846F1}">
-                <asvg:svgBlip xmlns:asvg="http://schemas.microsoft.com/office/drawing/2016/SVG/main" r:embed="rId12"/>
+                <asvg:svgBlip xmlns:asvg="http://schemas.microsoft.com/office/drawing/2016/SVG/main" r:embed="rId7"/>
               </a:ext>
             </a:extLst>
           </a:blip>
@@ -16469,10 +16609,10 @@
           <p:nvPr/>
         </p:nvPicPr>
         <p:blipFill>
-          <a:blip r:embed="rId13">
+          <a:blip>
             <a:extLst>
               <a:ext uri="{96DAC541-7B7A-43D3-8B79-37D633B846F1}">
-                <asvg:svgBlip xmlns:asvg="http://schemas.microsoft.com/office/drawing/2016/SVG/main" r:embed="rId14"/>
+                <asvg:svgBlip xmlns:asvg="http://schemas.microsoft.com/office/drawing/2016/SVG/main" r:embed="rId8"/>
               </a:ext>
             </a:extLst>
           </a:blip>
@@ -16505,10 +16645,10 @@
           <p:nvPr/>
         </p:nvPicPr>
         <p:blipFill>
-          <a:blip r:embed="rId15">
+          <a:blip>
             <a:extLst>
               <a:ext uri="{96DAC541-7B7A-43D3-8B79-37D633B846F1}">
-                <asvg:svgBlip xmlns:asvg="http://schemas.microsoft.com/office/drawing/2016/SVG/main" r:embed="rId16"/>
+                <asvg:svgBlip xmlns:asvg="http://schemas.microsoft.com/office/drawing/2016/SVG/main" r:embed="rId9"/>
               </a:ext>
             </a:extLst>
           </a:blip>
@@ -16541,10 +16681,10 @@
           <p:nvPr/>
         </p:nvPicPr>
         <p:blipFill>
-          <a:blip r:embed="rId17">
+          <a:blip>
             <a:extLst>
               <a:ext uri="{96DAC541-7B7A-43D3-8B79-37D633B846F1}">
-                <asvg:svgBlip xmlns:asvg="http://schemas.microsoft.com/office/drawing/2016/SVG/main" r:embed="rId18"/>
+                <asvg:svgBlip xmlns:asvg="http://schemas.microsoft.com/office/drawing/2016/SVG/main" r:embed="rId10"/>
               </a:ext>
             </a:extLst>
           </a:blip>
@@ -16577,10 +16717,10 @@
           <p:nvPr/>
         </p:nvPicPr>
         <p:blipFill>
-          <a:blip r:embed="rId19">
+          <a:blip>
             <a:extLst>
               <a:ext uri="{96DAC541-7B7A-43D3-8B79-37D633B846F1}">
-                <asvg:svgBlip xmlns:asvg="http://schemas.microsoft.com/office/drawing/2016/SVG/main" r:embed="rId20"/>
+                <asvg:svgBlip xmlns:asvg="http://schemas.microsoft.com/office/drawing/2016/SVG/main" r:embed="rId11"/>
               </a:ext>
             </a:extLst>
           </a:blip>
@@ -16613,10 +16753,10 @@
           <p:nvPr/>
         </p:nvPicPr>
         <p:blipFill>
-          <a:blip r:embed="rId21">
+          <a:blip>
             <a:extLst>
               <a:ext uri="{96DAC541-7B7A-43D3-8B79-37D633B846F1}">
-                <asvg:svgBlip xmlns:asvg="http://schemas.microsoft.com/office/drawing/2016/SVG/main" r:embed="rId22"/>
+                <asvg:svgBlip xmlns:asvg="http://schemas.microsoft.com/office/drawing/2016/SVG/main" r:embed="rId12"/>
               </a:ext>
             </a:extLst>
           </a:blip>
@@ -16649,10 +16789,10 @@
           <p:nvPr/>
         </p:nvPicPr>
         <p:blipFill>
-          <a:blip r:embed="rId23">
+          <a:blip>
             <a:extLst>
               <a:ext uri="{96DAC541-7B7A-43D3-8B79-37D633B846F1}">
-                <asvg:svgBlip xmlns:asvg="http://schemas.microsoft.com/office/drawing/2016/SVG/main" r:embed="rId24"/>
+                <asvg:svgBlip xmlns:asvg="http://schemas.microsoft.com/office/drawing/2016/SVG/main" r:embed="rId13"/>
               </a:ext>
             </a:extLst>
           </a:blip>
@@ -16902,7 +17042,7 @@
 </p:sld>
 </file>
 
-<file path=ppt/slides/slide28.xml><?xml version="1.0" encoding="utf-8"?>
+<file path=ppt/slides/slide29.xml><?xml version="1.0" encoding="utf-8"?>
 <p:sld xmlns:a="http://schemas.openxmlformats.org/drawingml/2006/main" xmlns:r="http://schemas.openxmlformats.org/officeDocument/2006/relationships" xmlns:p="http://schemas.openxmlformats.org/presentationml/2006/main">
   <p:cSld>
     <p:spTree>
@@ -17488,7 +17628,176 @@
 </p:sld>
 </file>
 
-<file path=ppt/slides/slide29.xml><?xml version="1.0" encoding="utf-8"?>
+<file path=ppt/slides/slide3.xml><?xml version="1.0" encoding="utf-8"?>
+<p:sld xmlns:a="http://schemas.openxmlformats.org/drawingml/2006/main" xmlns:r="http://schemas.openxmlformats.org/officeDocument/2006/relationships" xmlns:p="http://schemas.openxmlformats.org/presentationml/2006/main">
+  <p:cSld>
+    <p:spTree>
+      <p:nvGrpSpPr>
+        <p:cNvPr id="1" name=""/>
+        <p:cNvGrpSpPr/>
+        <p:nvPr/>
+      </p:nvGrpSpPr>
+      <p:grpSpPr>
+        <a:xfrm>
+          <a:off x="0" y="0"/>
+          <a:ext cx="0" cy="0"/>
+          <a:chOff x="0" y="0"/>
+          <a:chExt cx="0" cy="0"/>
+        </a:xfrm>
+      </p:grpSpPr>
+      <p:sp>
+        <p:nvSpPr>
+          <p:cNvPr id="2" name="Title 1">
+            <a:extLst>
+              <a:ext uri="{FF2B5EF4-FFF2-40B4-BE49-F238E27FC236}">
+                <a16:creationId xmlns:a16="http://schemas.microsoft.com/office/drawing/2014/main" id="{10D330C2-52A4-1ABA-980B-56FBC97F350C}"/>
+              </a:ext>
+            </a:extLst>
+          </p:cNvPr>
+          <p:cNvSpPr>
+            <a:spLocks noGrp="1"/>
+          </p:cNvSpPr>
+          <p:nvPr>
+            <p:ph type="title"/>
+          </p:nvPr>
+        </p:nvSpPr>
+        <p:spPr/>
+        <p:txBody>
+          <a:bodyPr/>
+          <a:lstStyle/>
+          <a:p>
+            <a:r>
+              <a:rPr lang="en-US" dirty="0"/>
+              <a:t>Plan for Today</a:t>
+            </a:r>
+          </a:p>
+        </p:txBody>
+      </p:sp>
+      <p:sp>
+        <p:nvSpPr>
+          <p:cNvPr id="3" name="Content Placeholder 2">
+            <a:extLst>
+              <a:ext uri="{FF2B5EF4-FFF2-40B4-BE49-F238E27FC236}">
+                <a16:creationId xmlns:a16="http://schemas.microsoft.com/office/drawing/2014/main" id="{9EAE50F6-429C-715A-C25C-1C7744AED1CF}"/>
+              </a:ext>
+            </a:extLst>
+          </p:cNvPr>
+          <p:cNvSpPr>
+            <a:spLocks noGrp="1"/>
+          </p:cNvSpPr>
+          <p:nvPr>
+            <p:ph idx="1"/>
+          </p:nvPr>
+        </p:nvSpPr>
+        <p:spPr/>
+        <p:txBody>
+          <a:bodyPr>
+            <a:normAutofit/>
+          </a:bodyPr>
+          <a:lstStyle/>
+          <a:p>
+            <a:pPr marL="182880" marR="0" lvl="0" indent="-182880" algn="l" defTabSz="914400" rtl="0" eaLnBrk="1" fontAlgn="auto" latinLnBrk="0" hangingPunct="1">
+              <a:lnSpc>
+                <a:spcPct val="100000"/>
+              </a:lnSpc>
+              <a:spcBef>
+                <a:spcPts val="0"/>
+              </a:spcBef>
+              <a:spcAft>
+                <a:spcPts val="0"/>
+              </a:spcAft>
+              <a:buClr>
+                <a:srgbClr val="93A299"/>
+              </a:buClr>
+              <a:buSzPts val="2040"/>
+              <a:buFont typeface="Arial"/>
+              <a:buChar char="•"/>
+              <a:tabLst/>
+              <a:defRPr/>
+            </a:pPr>
+            <a:r>
+              <a:rPr lang="en-US" sz="2400" kern="0" dirty="0">
+                <a:ea typeface="Arial"/>
+                <a:cs typeface="Arial"/>
+                <a:sym typeface="Arial"/>
+              </a:rPr>
+              <a:t>Narrative structures</a:t>
+            </a:r>
+          </a:p>
+          <a:p>
+            <a:pPr marL="182880" marR="0" lvl="0" indent="-182880" algn="l" defTabSz="914400" rtl="0" eaLnBrk="1" fontAlgn="auto" latinLnBrk="0" hangingPunct="1">
+              <a:lnSpc>
+                <a:spcPct val="100000"/>
+              </a:lnSpc>
+              <a:spcBef>
+                <a:spcPts val="0"/>
+              </a:spcBef>
+              <a:spcAft>
+                <a:spcPts val="0"/>
+              </a:spcAft>
+              <a:buClr>
+                <a:srgbClr val="93A299"/>
+              </a:buClr>
+              <a:buSzPts val="2040"/>
+              <a:buFont typeface="Arial"/>
+              <a:buChar char="•"/>
+              <a:tabLst/>
+              <a:defRPr/>
+            </a:pPr>
+            <a:r>
+              <a:rPr lang="en-US" sz="2400" kern="0" dirty="0">
+                <a:ea typeface="Arial"/>
+                <a:cs typeface="Arial"/>
+                <a:sym typeface="Arial"/>
+              </a:rPr>
+              <a:t>Narrative structures in visualization</a:t>
+            </a:r>
+          </a:p>
+          <a:p>
+            <a:pPr marL="182880" marR="0" lvl="0" indent="-182880" algn="l" defTabSz="914400" rtl="0" eaLnBrk="1" fontAlgn="auto" latinLnBrk="0" hangingPunct="1">
+              <a:lnSpc>
+                <a:spcPct val="100000"/>
+              </a:lnSpc>
+              <a:spcBef>
+                <a:spcPts val="0"/>
+              </a:spcBef>
+              <a:spcAft>
+                <a:spcPts val="0"/>
+              </a:spcAft>
+              <a:buClr>
+                <a:srgbClr val="93A299"/>
+              </a:buClr>
+              <a:buSzPts val="2040"/>
+              <a:buFont typeface="Arial"/>
+              <a:buChar char="•"/>
+              <a:tabLst/>
+              <a:defRPr/>
+            </a:pPr>
+            <a:r>
+              <a:rPr lang="en-US" sz="2400" kern="0" dirty="0">
+                <a:ea typeface="Arial"/>
+                <a:cs typeface="Arial"/>
+                <a:sym typeface="Arial"/>
+              </a:rPr>
+              <a:t>Roles of the reader and the author </a:t>
+            </a:r>
+          </a:p>
+        </p:txBody>
+      </p:sp>
+    </p:spTree>
+    <p:extLst>
+      <p:ext uri="{BB962C8B-B14F-4D97-AF65-F5344CB8AC3E}">
+        <p14:creationId xmlns:p14="http://schemas.microsoft.com/office/powerpoint/2010/main" val="1085546165"/>
+      </p:ext>
+    </p:extLst>
+  </p:cSld>
+  <p:clrMapOvr>
+    <a:masterClrMapping/>
+  </p:clrMapOvr>
+</p:sld>
+</file>
+
+<file path=ppt/slides/slide30.xml><?xml version="1.0" encoding="utf-8"?>
 <p:sld xmlns:a="http://schemas.openxmlformats.org/drawingml/2006/main" xmlns:r="http://schemas.openxmlformats.org/officeDocument/2006/relationships" xmlns:p="http://schemas.openxmlformats.org/presentationml/2006/main">
   <p:cSld>
     <p:spTree>
@@ -17654,7 +17963,583 @@
 </p:sld>
 </file>
 
-<file path=ppt/slides/slide3.xml><?xml version="1.0" encoding="utf-8"?>
+<file path=ppt/slides/slide31.xml><?xml version="1.0" encoding="utf-8"?>
+<p:sld xmlns:a="http://schemas.openxmlformats.org/drawingml/2006/main" xmlns:r="http://schemas.openxmlformats.org/officeDocument/2006/relationships" xmlns:p="http://schemas.openxmlformats.org/presentationml/2006/main">
+  <p:cSld>
+    <p:spTree>
+      <p:nvGrpSpPr>
+        <p:cNvPr id="1" name="Shape 402"/>
+        <p:cNvGrpSpPr/>
+        <p:nvPr/>
+      </p:nvGrpSpPr>
+      <p:grpSpPr>
+        <a:xfrm>
+          <a:off x="0" y="0"/>
+          <a:ext cx="0" cy="0"/>
+          <a:chOff x="0" y="0"/>
+          <a:chExt cx="0" cy="0"/>
+        </a:xfrm>
+      </p:grpSpPr>
+      <p:sp>
+        <p:nvSpPr>
+          <p:cNvPr id="2" name="Title 1">
+            <a:extLst>
+              <a:ext uri="{FF2B5EF4-FFF2-40B4-BE49-F238E27FC236}">
+                <a16:creationId xmlns:a16="http://schemas.microsoft.com/office/drawing/2014/main" id="{6E31D581-117E-F886-8614-AD27570441C8}"/>
+              </a:ext>
+            </a:extLst>
+          </p:cNvPr>
+          <p:cNvSpPr txBox="1">
+            <a:spLocks/>
+          </p:cNvSpPr>
+          <p:nvPr/>
+        </p:nvSpPr>
+        <p:spPr>
+          <a:xfrm>
+            <a:off x="252919" y="1123837"/>
+            <a:ext cx="2947482" cy="4601183"/>
+          </a:xfrm>
+          <a:prstGeom prst="rect">
+            <a:avLst/>
+          </a:prstGeom>
+        </p:spPr>
+        <p:txBody>
+          <a:bodyPr vert="horz" lIns="91440" tIns="45720" rIns="91440" bIns="45720" rtlCol="0" anchor="ctr">
+            <a:normAutofit/>
+          </a:bodyPr>
+          <a:lstStyle>
+            <a:lvl1pPr algn="l" defTabSz="914400" rtl="0" eaLnBrk="1" latinLnBrk="0" hangingPunct="1">
+              <a:lnSpc>
+                <a:spcPct val="90000"/>
+              </a:lnSpc>
+              <a:spcBef>
+                <a:spcPct val="0"/>
+              </a:spcBef>
+              <a:buNone/>
+              <a:defRPr sz="3600" kern="1200" spc="-60" baseline="0">
+                <a:solidFill>
+                  <a:srgbClr val="FFFFFF"/>
+                </a:solidFill>
+                <a:latin typeface="+mj-lt"/>
+                <a:ea typeface="+mj-ea"/>
+                <a:cs typeface="+mj-cs"/>
+              </a:defRPr>
+            </a:lvl1pPr>
+          </a:lstStyle>
+          <a:p>
+            <a:r>
+              <a:rPr lang="en-US" dirty="0"/>
+              <a:t>Example: Track Covid-19 in the US (interactive)</a:t>
+            </a:r>
+          </a:p>
+        </p:txBody>
+      </p:sp>
+      <p:sp>
+        <p:nvSpPr>
+          <p:cNvPr id="4" name="TextBox 3">
+            <a:extLst>
+              <a:ext uri="{FF2B5EF4-FFF2-40B4-BE49-F238E27FC236}">
+                <a16:creationId xmlns:a16="http://schemas.microsoft.com/office/drawing/2014/main" id="{DB85F6EC-F44C-37C1-4417-E5348025C6D5}"/>
+              </a:ext>
+            </a:extLst>
+          </p:cNvPr>
+          <p:cNvSpPr txBox="1"/>
+          <p:nvPr/>
+        </p:nvSpPr>
+        <p:spPr>
+          <a:xfrm>
+            <a:off x="3605646" y="5973925"/>
+            <a:ext cx="6102926" cy="646331"/>
+          </a:xfrm>
+          <a:prstGeom prst="rect">
+            <a:avLst/>
+          </a:prstGeom>
+          <a:noFill/>
+        </p:spPr>
+        <p:txBody>
+          <a:bodyPr wrap="square">
+            <a:spAutoFit/>
+          </a:bodyPr>
+          <a:lstStyle/>
+          <a:p>
+            <a:r>
+              <a:rPr lang="en-US" dirty="0">
+                <a:hlinkClick r:id="rId3"/>
+              </a:rPr>
+              <a:t>https://www.nytimes.com/interactive/2023/us/covid-cases.html</a:t>
+            </a:r>
+            <a:r>
+              <a:rPr lang="en-US" dirty="0"/>
+              <a:t> </a:t>
+            </a:r>
+          </a:p>
+        </p:txBody>
+      </p:sp>
+      <p:pic>
+        <p:nvPicPr>
+          <p:cNvPr id="7" name="Content Placeholder 6">
+            <a:extLst>
+              <a:ext uri="{FF2B5EF4-FFF2-40B4-BE49-F238E27FC236}">
+                <a16:creationId xmlns:a16="http://schemas.microsoft.com/office/drawing/2014/main" id="{9CD8A788-AE41-B07C-FC51-3E055099EF72}"/>
+              </a:ext>
+            </a:extLst>
+          </p:cNvPr>
+          <p:cNvPicPr>
+            <a:picLocks noGrp="1" noChangeAspect="1"/>
+          </p:cNvPicPr>
+          <p:nvPr>
+            <p:ph idx="1"/>
+          </p:nvPr>
+        </p:nvPicPr>
+        <p:blipFill>
+          <a:blip r:embed="rId4"/>
+          <a:stretch>
+            <a:fillRect/>
+          </a:stretch>
+        </p:blipFill>
+        <p:spPr>
+          <a:xfrm>
+            <a:off x="4035578" y="863600"/>
+            <a:ext cx="6981519" cy="5121275"/>
+          </a:xfrm>
+        </p:spPr>
+      </p:pic>
+    </p:spTree>
+  </p:cSld>
+  <p:clrMapOvr>
+    <a:masterClrMapping/>
+  </p:clrMapOvr>
+</p:sld>
+</file>
+
+<file path=ppt/slides/slide32.xml><?xml version="1.0" encoding="utf-8"?>
+<p:sld xmlns:a="http://schemas.openxmlformats.org/drawingml/2006/main" xmlns:r="http://schemas.openxmlformats.org/officeDocument/2006/relationships" xmlns:p="http://schemas.openxmlformats.org/presentationml/2006/main">
+  <p:cSld>
+    <p:spTree>
+      <p:nvGrpSpPr>
+        <p:cNvPr id="1" name="Shape 402">
+          <a:extLst>
+            <a:ext uri="{FF2B5EF4-FFF2-40B4-BE49-F238E27FC236}">
+              <a16:creationId xmlns:a16="http://schemas.microsoft.com/office/drawing/2014/main" id="{73D2CC45-16EF-FED0-2A93-2F9B63246EC4}"/>
+            </a:ext>
+          </a:extLst>
+        </p:cNvPr>
+        <p:cNvGrpSpPr/>
+        <p:nvPr/>
+      </p:nvGrpSpPr>
+      <p:grpSpPr>
+        <a:xfrm>
+          <a:off x="0" y="0"/>
+          <a:ext cx="0" cy="0"/>
+          <a:chOff x="0" y="0"/>
+          <a:chExt cx="0" cy="0"/>
+        </a:xfrm>
+      </p:grpSpPr>
+      <p:sp>
+        <p:nvSpPr>
+          <p:cNvPr id="2" name="Title 1">
+            <a:extLst>
+              <a:ext uri="{FF2B5EF4-FFF2-40B4-BE49-F238E27FC236}">
+                <a16:creationId xmlns:a16="http://schemas.microsoft.com/office/drawing/2014/main" id="{8FFC442C-93A3-E285-BD38-CB85243A4B5A}"/>
+              </a:ext>
+            </a:extLst>
+          </p:cNvPr>
+          <p:cNvSpPr txBox="1">
+            <a:spLocks/>
+          </p:cNvSpPr>
+          <p:nvPr/>
+        </p:nvSpPr>
+        <p:spPr>
+          <a:xfrm>
+            <a:off x="252919" y="1123837"/>
+            <a:ext cx="2947482" cy="4601183"/>
+          </a:xfrm>
+          <a:prstGeom prst="rect">
+            <a:avLst/>
+          </a:prstGeom>
+        </p:spPr>
+        <p:txBody>
+          <a:bodyPr vert="horz" lIns="91440" tIns="45720" rIns="91440" bIns="45720" rtlCol="0" anchor="ctr">
+            <a:normAutofit/>
+          </a:bodyPr>
+          <a:lstStyle>
+            <a:lvl1pPr algn="l" defTabSz="914400" rtl="0" eaLnBrk="1" latinLnBrk="0" hangingPunct="1">
+              <a:lnSpc>
+                <a:spcPct val="90000"/>
+              </a:lnSpc>
+              <a:spcBef>
+                <a:spcPct val="0"/>
+              </a:spcBef>
+              <a:buNone/>
+              <a:defRPr sz="3600" kern="1200" spc="-60" baseline="0">
+                <a:solidFill>
+                  <a:srgbClr val="FFFFFF"/>
+                </a:solidFill>
+                <a:latin typeface="+mj-lt"/>
+                <a:ea typeface="+mj-ea"/>
+                <a:cs typeface="+mj-cs"/>
+              </a:defRPr>
+            </a:lvl1pPr>
+          </a:lstStyle>
+          <a:p>
+            <a:r>
+              <a:rPr lang="en-US" dirty="0"/>
+              <a:t>Example: Hospital Data (interactive)</a:t>
+            </a:r>
+          </a:p>
+        </p:txBody>
+      </p:sp>
+      <p:sp>
+        <p:nvSpPr>
+          <p:cNvPr id="4" name="TextBox 3">
+            <a:extLst>
+              <a:ext uri="{FF2B5EF4-FFF2-40B4-BE49-F238E27FC236}">
+                <a16:creationId xmlns:a16="http://schemas.microsoft.com/office/drawing/2014/main" id="{4D57306A-C452-D0D3-302A-60953840D81C}"/>
+              </a:ext>
+            </a:extLst>
+          </p:cNvPr>
+          <p:cNvSpPr txBox="1"/>
+          <p:nvPr/>
+        </p:nvSpPr>
+        <p:spPr>
+          <a:xfrm>
+            <a:off x="3605646" y="5973925"/>
+            <a:ext cx="6102926" cy="646331"/>
+          </a:xfrm>
+          <a:prstGeom prst="rect">
+            <a:avLst/>
+          </a:prstGeom>
+          <a:noFill/>
+        </p:spPr>
+        <p:txBody>
+          <a:bodyPr wrap="square">
+            <a:spAutoFit/>
+          </a:bodyPr>
+          <a:lstStyle/>
+          <a:p>
+            <a:r>
+              <a:rPr lang="en-US" dirty="0">
+                <a:hlinkClick r:id="rId3"/>
+              </a:rPr>
+              <a:t>https://shiny.posit.co/r/gallery/life-sciences/hospital-data-antimicrobial/</a:t>
+            </a:r>
+            <a:r>
+              <a:rPr lang="en-US" dirty="0"/>
+              <a:t> </a:t>
+            </a:r>
+          </a:p>
+        </p:txBody>
+      </p:sp>
+      <p:pic>
+        <p:nvPicPr>
+          <p:cNvPr id="8" name="Content Placeholder 7" descr="A screenshot of a computer&#10;&#10;AI-generated content may be incorrect.">
+            <a:extLst>
+              <a:ext uri="{FF2B5EF4-FFF2-40B4-BE49-F238E27FC236}">
+                <a16:creationId xmlns:a16="http://schemas.microsoft.com/office/drawing/2014/main" id="{C97B2881-3C69-6178-3DDE-EFAD95EDE6CE}"/>
+              </a:ext>
+            </a:extLst>
+          </p:cNvPr>
+          <p:cNvPicPr>
+            <a:picLocks noGrp="1" noChangeAspect="1"/>
+          </p:cNvPicPr>
+          <p:nvPr>
+            <p:ph idx="1"/>
+          </p:nvPr>
+        </p:nvPicPr>
+        <p:blipFill>
+          <a:blip r:embed="rId4"/>
+          <a:stretch>
+            <a:fillRect/>
+          </a:stretch>
+        </p:blipFill>
+        <p:spPr>
+          <a:xfrm>
+            <a:off x="3662218" y="827206"/>
+            <a:ext cx="7315200" cy="4753794"/>
+          </a:xfrm>
+        </p:spPr>
+      </p:pic>
+    </p:spTree>
+    <p:extLst>
+      <p:ext uri="{BB962C8B-B14F-4D97-AF65-F5344CB8AC3E}">
+        <p14:creationId xmlns:p14="http://schemas.microsoft.com/office/powerpoint/2010/main" val="2430931676"/>
+      </p:ext>
+    </p:extLst>
+  </p:cSld>
+  <p:clrMapOvr>
+    <a:masterClrMapping/>
+  </p:clrMapOvr>
+</p:sld>
+</file>
+
+<file path=ppt/slides/slide33.xml><?xml version="1.0" encoding="utf-8"?>
+<p:sld xmlns:a="http://schemas.openxmlformats.org/drawingml/2006/main" xmlns:r="http://schemas.openxmlformats.org/officeDocument/2006/relationships" xmlns:p="http://schemas.openxmlformats.org/presentationml/2006/main">
+  <p:cSld>
+    <p:spTree>
+      <p:nvGrpSpPr>
+        <p:cNvPr id="1" name="Shape 408"/>
+        <p:cNvGrpSpPr/>
+        <p:nvPr/>
+      </p:nvGrpSpPr>
+      <p:grpSpPr>
+        <a:xfrm>
+          <a:off x="0" y="0"/>
+          <a:ext cx="0" cy="0"/>
+          <a:chOff x="0" y="0"/>
+          <a:chExt cx="0" cy="0"/>
+        </a:xfrm>
+      </p:grpSpPr>
+      <p:sp>
+        <p:nvSpPr>
+          <p:cNvPr id="410" name="Google Shape;410;p41"/>
+          <p:cNvSpPr txBox="1">
+            <a:spLocks noGrp="1"/>
+          </p:cNvSpPr>
+          <p:nvPr>
+            <p:ph type="body" idx="1"/>
+          </p:nvPr>
+        </p:nvSpPr>
+        <p:spPr>
+          <a:xfrm>
+            <a:off x="3519054" y="1253836"/>
+            <a:ext cx="8229600" cy="4876800"/>
+          </a:xfrm>
+          <a:prstGeom prst="rect">
+            <a:avLst/>
+          </a:prstGeom>
+          <a:noFill/>
+          <a:ln>
+            <a:noFill/>
+          </a:ln>
+        </p:spPr>
+        <p:txBody>
+          <a:bodyPr spcFirstLastPara="1" vert="horz" wrap="square" lIns="91425" tIns="45700" rIns="91425" bIns="45700" rtlCol="0" anchor="t" anchorCtr="0">
+            <a:noAutofit/>
+          </a:bodyPr>
+          <a:lstStyle/>
+          <a:p>
+            <a:pPr>
+              <a:spcBef>
+                <a:spcPts val="0"/>
+              </a:spcBef>
+              <a:buSzPts val="2040"/>
+              <a:buFont typeface="Arial"/>
+              <a:buChar char="•"/>
+            </a:pPr>
+            <a:r>
+              <a:rPr lang="en-US" sz="2400" dirty="0">
+                <a:ea typeface="Arial"/>
+                <a:cs typeface="Arial"/>
+                <a:sym typeface="Arial"/>
+              </a:rPr>
+              <a:t>Work in small groups or pairs</a:t>
+            </a:r>
+          </a:p>
+          <a:p>
+            <a:pPr>
+              <a:spcBef>
+                <a:spcPts val="0"/>
+              </a:spcBef>
+              <a:buSzPts val="2040"/>
+              <a:buFont typeface="Arial"/>
+              <a:buChar char="•"/>
+            </a:pPr>
+            <a:endParaRPr lang="en-US" sz="2400" dirty="0">
+              <a:ea typeface="Arial"/>
+              <a:cs typeface="Arial"/>
+              <a:sym typeface="Arial"/>
+            </a:endParaRPr>
+          </a:p>
+          <a:p>
+            <a:pPr>
+              <a:spcBef>
+                <a:spcPts val="0"/>
+              </a:spcBef>
+              <a:buSzPts val="2040"/>
+              <a:buFont typeface="Arial"/>
+              <a:buChar char="•"/>
+            </a:pPr>
+            <a:r>
+              <a:rPr lang="en-US" sz="2400" dirty="0">
+                <a:ea typeface="Arial"/>
+                <a:cs typeface="Arial"/>
+                <a:sym typeface="Arial"/>
+              </a:rPr>
+              <a:t>Pick a topic of interest to you </a:t>
+            </a:r>
+          </a:p>
+          <a:p>
+            <a:pPr>
+              <a:spcBef>
+                <a:spcPts val="0"/>
+              </a:spcBef>
+              <a:buSzPts val="2040"/>
+              <a:buFont typeface="Arial"/>
+              <a:buChar char="•"/>
+            </a:pPr>
+            <a:endParaRPr lang="en-US" sz="2400" dirty="0">
+              <a:ea typeface="Arial"/>
+              <a:cs typeface="Arial"/>
+              <a:sym typeface="Arial"/>
+            </a:endParaRPr>
+          </a:p>
+          <a:p>
+            <a:pPr>
+              <a:spcBef>
+                <a:spcPts val="0"/>
+              </a:spcBef>
+              <a:buSzPts val="2040"/>
+              <a:buFont typeface="Arial"/>
+              <a:buChar char="•"/>
+            </a:pPr>
+            <a:r>
+              <a:rPr lang="en-US" sz="2400" dirty="0">
+                <a:ea typeface="Arial"/>
+                <a:cs typeface="Arial"/>
+                <a:sym typeface="Arial"/>
+              </a:rPr>
+              <a:t>Sketch 3 possible narrative visualizations for your topic</a:t>
+            </a:r>
+          </a:p>
+          <a:p>
+            <a:pPr>
+              <a:spcBef>
+                <a:spcPts val="0"/>
+              </a:spcBef>
+              <a:buSzPts val="2040"/>
+              <a:buFont typeface="Arial"/>
+              <a:buChar char="•"/>
+            </a:pPr>
+            <a:endParaRPr lang="en-US" sz="2400" dirty="0">
+              <a:ea typeface="Arial"/>
+              <a:cs typeface="Arial"/>
+              <a:sym typeface="Arial"/>
+            </a:endParaRPr>
+          </a:p>
+          <a:p>
+            <a:pPr lvl="1">
+              <a:spcBef>
+                <a:spcPts val="0"/>
+              </a:spcBef>
+              <a:buSzPts val="2040"/>
+              <a:buFont typeface="Arial"/>
+              <a:buChar char="•"/>
+            </a:pPr>
+            <a:r>
+              <a:rPr lang="en-US" sz="2200" dirty="0">
+                <a:ea typeface="Arial"/>
+                <a:cs typeface="Arial"/>
+                <a:sym typeface="Arial"/>
+              </a:rPr>
+              <a:t>One should be primary author-driven</a:t>
+            </a:r>
+          </a:p>
+          <a:p>
+            <a:pPr lvl="1">
+              <a:spcBef>
+                <a:spcPts val="0"/>
+              </a:spcBef>
+              <a:buSzPts val="2040"/>
+              <a:buFont typeface="Arial"/>
+              <a:buChar char="•"/>
+            </a:pPr>
+            <a:r>
+              <a:rPr lang="en-US" sz="2200" dirty="0">
+                <a:ea typeface="Arial"/>
+                <a:cs typeface="Arial"/>
+                <a:sym typeface="Arial"/>
+              </a:rPr>
+              <a:t>One should be primarily reader-driven</a:t>
+            </a:r>
+          </a:p>
+          <a:p>
+            <a:pPr lvl="1">
+              <a:spcBef>
+                <a:spcPts val="0"/>
+              </a:spcBef>
+              <a:buSzPts val="2040"/>
+              <a:buFont typeface="Arial"/>
+              <a:buChar char="•"/>
+            </a:pPr>
+            <a:r>
+              <a:rPr lang="en-US" sz="2200" dirty="0">
+                <a:ea typeface="Arial"/>
+                <a:cs typeface="Arial"/>
+                <a:sym typeface="Arial"/>
+              </a:rPr>
+              <a:t>And the last should be somewhere between</a:t>
+            </a:r>
+            <a:endParaRPr sz="2200" dirty="0">
+              <a:ea typeface="Arial"/>
+              <a:cs typeface="Arial"/>
+              <a:sym typeface="Arial"/>
+            </a:endParaRPr>
+          </a:p>
+        </p:txBody>
+      </p:sp>
+      <p:sp>
+        <p:nvSpPr>
+          <p:cNvPr id="2" name="Title 1">
+            <a:extLst>
+              <a:ext uri="{FF2B5EF4-FFF2-40B4-BE49-F238E27FC236}">
+                <a16:creationId xmlns:a16="http://schemas.microsoft.com/office/drawing/2014/main" id="{009A9AC3-B035-3A25-CE13-5648E801AD25}"/>
+              </a:ext>
+            </a:extLst>
+          </p:cNvPr>
+          <p:cNvSpPr txBox="1">
+            <a:spLocks/>
+          </p:cNvSpPr>
+          <p:nvPr/>
+        </p:nvSpPr>
+        <p:spPr>
+          <a:xfrm>
+            <a:off x="252919" y="1123837"/>
+            <a:ext cx="2947482" cy="4601183"/>
+          </a:xfrm>
+          <a:prstGeom prst="rect">
+            <a:avLst/>
+          </a:prstGeom>
+        </p:spPr>
+        <p:txBody>
+          <a:bodyPr vert="horz" lIns="91440" tIns="45720" rIns="91440" bIns="45720" rtlCol="0" anchor="ctr">
+            <a:normAutofit/>
+          </a:bodyPr>
+          <a:lstStyle>
+            <a:lvl1pPr algn="l" defTabSz="914400" rtl="0" eaLnBrk="1" latinLnBrk="0" hangingPunct="1">
+              <a:lnSpc>
+                <a:spcPct val="90000"/>
+              </a:lnSpc>
+              <a:spcBef>
+                <a:spcPct val="0"/>
+              </a:spcBef>
+              <a:buNone/>
+              <a:defRPr sz="3600" kern="1200" spc="-60" baseline="0">
+                <a:solidFill>
+                  <a:srgbClr val="FFFFFF"/>
+                </a:solidFill>
+                <a:latin typeface="+mj-lt"/>
+                <a:ea typeface="+mj-ea"/>
+                <a:cs typeface="+mj-cs"/>
+              </a:defRPr>
+            </a:lvl1pPr>
+          </a:lstStyle>
+          <a:p>
+            <a:r>
+              <a:rPr lang="en-US" dirty="0"/>
+              <a:t>Practice</a:t>
+            </a:r>
+          </a:p>
+        </p:txBody>
+      </p:sp>
+    </p:spTree>
+  </p:cSld>
+  <p:clrMapOvr>
+    <a:masterClrMapping/>
+  </p:clrMapOvr>
+</p:sld>
+</file>
+
+<file path=ppt/slides/slide4.xml><?xml version="1.0" encoding="utf-8"?>
 <p:sld xmlns:a="http://schemas.openxmlformats.org/drawingml/2006/main" xmlns:r="http://schemas.openxmlformats.org/officeDocument/2006/relationships" xmlns:p="http://schemas.openxmlformats.org/presentationml/2006/main">
   <p:cSld>
     <p:spTree>
@@ -17906,583 +18791,7 @@
 </p:sld>
 </file>
 
-<file path=ppt/slides/slide30.xml><?xml version="1.0" encoding="utf-8"?>
-<p:sld xmlns:a="http://schemas.openxmlformats.org/drawingml/2006/main" xmlns:r="http://schemas.openxmlformats.org/officeDocument/2006/relationships" xmlns:p="http://schemas.openxmlformats.org/presentationml/2006/main">
-  <p:cSld>
-    <p:spTree>
-      <p:nvGrpSpPr>
-        <p:cNvPr id="1" name="Shape 402"/>
-        <p:cNvGrpSpPr/>
-        <p:nvPr/>
-      </p:nvGrpSpPr>
-      <p:grpSpPr>
-        <a:xfrm>
-          <a:off x="0" y="0"/>
-          <a:ext cx="0" cy="0"/>
-          <a:chOff x="0" y="0"/>
-          <a:chExt cx="0" cy="0"/>
-        </a:xfrm>
-      </p:grpSpPr>
-      <p:sp>
-        <p:nvSpPr>
-          <p:cNvPr id="2" name="Title 1">
-            <a:extLst>
-              <a:ext uri="{FF2B5EF4-FFF2-40B4-BE49-F238E27FC236}">
-                <a16:creationId xmlns:a16="http://schemas.microsoft.com/office/drawing/2014/main" id="{6E31D581-117E-F886-8614-AD27570441C8}"/>
-              </a:ext>
-            </a:extLst>
-          </p:cNvPr>
-          <p:cNvSpPr txBox="1">
-            <a:spLocks/>
-          </p:cNvSpPr>
-          <p:nvPr/>
-        </p:nvSpPr>
-        <p:spPr>
-          <a:xfrm>
-            <a:off x="252919" y="1123837"/>
-            <a:ext cx="2947482" cy="4601183"/>
-          </a:xfrm>
-          <a:prstGeom prst="rect">
-            <a:avLst/>
-          </a:prstGeom>
-        </p:spPr>
-        <p:txBody>
-          <a:bodyPr vert="horz" lIns="91440" tIns="45720" rIns="91440" bIns="45720" rtlCol="0" anchor="ctr">
-            <a:normAutofit/>
-          </a:bodyPr>
-          <a:lstStyle>
-            <a:lvl1pPr algn="l" defTabSz="914400" rtl="0" eaLnBrk="1" latinLnBrk="0" hangingPunct="1">
-              <a:lnSpc>
-                <a:spcPct val="90000"/>
-              </a:lnSpc>
-              <a:spcBef>
-                <a:spcPct val="0"/>
-              </a:spcBef>
-              <a:buNone/>
-              <a:defRPr sz="3600" kern="1200" spc="-60" baseline="0">
-                <a:solidFill>
-                  <a:srgbClr val="FFFFFF"/>
-                </a:solidFill>
-                <a:latin typeface="+mj-lt"/>
-                <a:ea typeface="+mj-ea"/>
-                <a:cs typeface="+mj-cs"/>
-              </a:defRPr>
-            </a:lvl1pPr>
-          </a:lstStyle>
-          <a:p>
-            <a:r>
-              <a:rPr lang="en-US" dirty="0"/>
-              <a:t>Example: Track Covid-19 in the US (interactive)</a:t>
-            </a:r>
-          </a:p>
-        </p:txBody>
-      </p:sp>
-      <p:sp>
-        <p:nvSpPr>
-          <p:cNvPr id="4" name="TextBox 3">
-            <a:extLst>
-              <a:ext uri="{FF2B5EF4-FFF2-40B4-BE49-F238E27FC236}">
-                <a16:creationId xmlns:a16="http://schemas.microsoft.com/office/drawing/2014/main" id="{DB85F6EC-F44C-37C1-4417-E5348025C6D5}"/>
-              </a:ext>
-            </a:extLst>
-          </p:cNvPr>
-          <p:cNvSpPr txBox="1"/>
-          <p:nvPr/>
-        </p:nvSpPr>
-        <p:spPr>
-          <a:xfrm>
-            <a:off x="3605646" y="5973925"/>
-            <a:ext cx="6102926" cy="646331"/>
-          </a:xfrm>
-          <a:prstGeom prst="rect">
-            <a:avLst/>
-          </a:prstGeom>
-          <a:noFill/>
-        </p:spPr>
-        <p:txBody>
-          <a:bodyPr wrap="square">
-            <a:spAutoFit/>
-          </a:bodyPr>
-          <a:lstStyle/>
-          <a:p>
-            <a:r>
-              <a:rPr lang="en-US" dirty="0">
-                <a:hlinkClick r:id="rId3"/>
-              </a:rPr>
-              <a:t>https://www.nytimes.com/interactive/2023/us/covid-cases.html</a:t>
-            </a:r>
-            <a:r>
-              <a:rPr lang="en-US" dirty="0"/>
-              <a:t> </a:t>
-            </a:r>
-          </a:p>
-        </p:txBody>
-      </p:sp>
-      <p:pic>
-        <p:nvPicPr>
-          <p:cNvPr id="7" name="Content Placeholder 6">
-            <a:extLst>
-              <a:ext uri="{FF2B5EF4-FFF2-40B4-BE49-F238E27FC236}">
-                <a16:creationId xmlns:a16="http://schemas.microsoft.com/office/drawing/2014/main" id="{9CD8A788-AE41-B07C-FC51-3E055099EF72}"/>
-              </a:ext>
-            </a:extLst>
-          </p:cNvPr>
-          <p:cNvPicPr>
-            <a:picLocks noGrp="1" noChangeAspect="1"/>
-          </p:cNvPicPr>
-          <p:nvPr>
-            <p:ph idx="1"/>
-          </p:nvPr>
-        </p:nvPicPr>
-        <p:blipFill>
-          <a:blip r:embed="rId4"/>
-          <a:stretch>
-            <a:fillRect/>
-          </a:stretch>
-        </p:blipFill>
-        <p:spPr>
-          <a:xfrm>
-            <a:off x="4035578" y="863600"/>
-            <a:ext cx="6981519" cy="5121275"/>
-          </a:xfrm>
-        </p:spPr>
-      </p:pic>
-    </p:spTree>
-  </p:cSld>
-  <p:clrMapOvr>
-    <a:masterClrMapping/>
-  </p:clrMapOvr>
-</p:sld>
-</file>
-
-<file path=ppt/slides/slide31.xml><?xml version="1.0" encoding="utf-8"?>
-<p:sld xmlns:a="http://schemas.openxmlformats.org/drawingml/2006/main" xmlns:r="http://schemas.openxmlformats.org/officeDocument/2006/relationships" xmlns:p="http://schemas.openxmlformats.org/presentationml/2006/main">
-  <p:cSld>
-    <p:spTree>
-      <p:nvGrpSpPr>
-        <p:cNvPr id="1" name="Shape 402">
-          <a:extLst>
-            <a:ext uri="{FF2B5EF4-FFF2-40B4-BE49-F238E27FC236}">
-              <a16:creationId xmlns:a16="http://schemas.microsoft.com/office/drawing/2014/main" id="{73D2CC45-16EF-FED0-2A93-2F9B63246EC4}"/>
-            </a:ext>
-          </a:extLst>
-        </p:cNvPr>
-        <p:cNvGrpSpPr/>
-        <p:nvPr/>
-      </p:nvGrpSpPr>
-      <p:grpSpPr>
-        <a:xfrm>
-          <a:off x="0" y="0"/>
-          <a:ext cx="0" cy="0"/>
-          <a:chOff x="0" y="0"/>
-          <a:chExt cx="0" cy="0"/>
-        </a:xfrm>
-      </p:grpSpPr>
-      <p:sp>
-        <p:nvSpPr>
-          <p:cNvPr id="2" name="Title 1">
-            <a:extLst>
-              <a:ext uri="{FF2B5EF4-FFF2-40B4-BE49-F238E27FC236}">
-                <a16:creationId xmlns:a16="http://schemas.microsoft.com/office/drawing/2014/main" id="{8FFC442C-93A3-E285-BD38-CB85243A4B5A}"/>
-              </a:ext>
-            </a:extLst>
-          </p:cNvPr>
-          <p:cNvSpPr txBox="1">
-            <a:spLocks/>
-          </p:cNvSpPr>
-          <p:nvPr/>
-        </p:nvSpPr>
-        <p:spPr>
-          <a:xfrm>
-            <a:off x="252919" y="1123837"/>
-            <a:ext cx="2947482" cy="4601183"/>
-          </a:xfrm>
-          <a:prstGeom prst="rect">
-            <a:avLst/>
-          </a:prstGeom>
-        </p:spPr>
-        <p:txBody>
-          <a:bodyPr vert="horz" lIns="91440" tIns="45720" rIns="91440" bIns="45720" rtlCol="0" anchor="ctr">
-            <a:normAutofit/>
-          </a:bodyPr>
-          <a:lstStyle>
-            <a:lvl1pPr algn="l" defTabSz="914400" rtl="0" eaLnBrk="1" latinLnBrk="0" hangingPunct="1">
-              <a:lnSpc>
-                <a:spcPct val="90000"/>
-              </a:lnSpc>
-              <a:spcBef>
-                <a:spcPct val="0"/>
-              </a:spcBef>
-              <a:buNone/>
-              <a:defRPr sz="3600" kern="1200" spc="-60" baseline="0">
-                <a:solidFill>
-                  <a:srgbClr val="FFFFFF"/>
-                </a:solidFill>
-                <a:latin typeface="+mj-lt"/>
-                <a:ea typeface="+mj-ea"/>
-                <a:cs typeface="+mj-cs"/>
-              </a:defRPr>
-            </a:lvl1pPr>
-          </a:lstStyle>
-          <a:p>
-            <a:r>
-              <a:rPr lang="en-US" dirty="0"/>
-              <a:t>Example: Hospital Data (interactive)</a:t>
-            </a:r>
-          </a:p>
-        </p:txBody>
-      </p:sp>
-      <p:sp>
-        <p:nvSpPr>
-          <p:cNvPr id="4" name="TextBox 3">
-            <a:extLst>
-              <a:ext uri="{FF2B5EF4-FFF2-40B4-BE49-F238E27FC236}">
-                <a16:creationId xmlns:a16="http://schemas.microsoft.com/office/drawing/2014/main" id="{4D57306A-C452-D0D3-302A-60953840D81C}"/>
-              </a:ext>
-            </a:extLst>
-          </p:cNvPr>
-          <p:cNvSpPr txBox="1"/>
-          <p:nvPr/>
-        </p:nvSpPr>
-        <p:spPr>
-          <a:xfrm>
-            <a:off x="3605646" y="5973925"/>
-            <a:ext cx="6102926" cy="646331"/>
-          </a:xfrm>
-          <a:prstGeom prst="rect">
-            <a:avLst/>
-          </a:prstGeom>
-          <a:noFill/>
-        </p:spPr>
-        <p:txBody>
-          <a:bodyPr wrap="square">
-            <a:spAutoFit/>
-          </a:bodyPr>
-          <a:lstStyle/>
-          <a:p>
-            <a:r>
-              <a:rPr lang="en-US" dirty="0">
-                <a:hlinkClick r:id="rId3"/>
-              </a:rPr>
-              <a:t>https://shiny.posit.co/r/gallery/life-sciences/hospital-data-antimicrobial/</a:t>
-            </a:r>
-            <a:r>
-              <a:rPr lang="en-US" dirty="0"/>
-              <a:t> </a:t>
-            </a:r>
-          </a:p>
-        </p:txBody>
-      </p:sp>
-      <p:pic>
-        <p:nvPicPr>
-          <p:cNvPr id="8" name="Content Placeholder 7" descr="A screenshot of a computer&#10;&#10;AI-generated content may be incorrect.">
-            <a:extLst>
-              <a:ext uri="{FF2B5EF4-FFF2-40B4-BE49-F238E27FC236}">
-                <a16:creationId xmlns:a16="http://schemas.microsoft.com/office/drawing/2014/main" id="{C97B2881-3C69-6178-3DDE-EFAD95EDE6CE}"/>
-              </a:ext>
-            </a:extLst>
-          </p:cNvPr>
-          <p:cNvPicPr>
-            <a:picLocks noGrp="1" noChangeAspect="1"/>
-          </p:cNvPicPr>
-          <p:nvPr>
-            <p:ph idx="1"/>
-          </p:nvPr>
-        </p:nvPicPr>
-        <p:blipFill>
-          <a:blip r:embed="rId4"/>
-          <a:stretch>
-            <a:fillRect/>
-          </a:stretch>
-        </p:blipFill>
-        <p:spPr>
-          <a:xfrm>
-            <a:off x="3662218" y="827206"/>
-            <a:ext cx="7315200" cy="4753794"/>
-          </a:xfrm>
-        </p:spPr>
-      </p:pic>
-    </p:spTree>
-    <p:extLst>
-      <p:ext uri="{BB962C8B-B14F-4D97-AF65-F5344CB8AC3E}">
-        <p14:creationId xmlns:p14="http://schemas.microsoft.com/office/powerpoint/2010/main" val="2430931676"/>
-      </p:ext>
-    </p:extLst>
-  </p:cSld>
-  <p:clrMapOvr>
-    <a:masterClrMapping/>
-  </p:clrMapOvr>
-</p:sld>
-</file>
-
-<file path=ppt/slides/slide32.xml><?xml version="1.0" encoding="utf-8"?>
-<p:sld xmlns:a="http://schemas.openxmlformats.org/drawingml/2006/main" xmlns:r="http://schemas.openxmlformats.org/officeDocument/2006/relationships" xmlns:p="http://schemas.openxmlformats.org/presentationml/2006/main">
-  <p:cSld>
-    <p:spTree>
-      <p:nvGrpSpPr>
-        <p:cNvPr id="1" name="Shape 408"/>
-        <p:cNvGrpSpPr/>
-        <p:nvPr/>
-      </p:nvGrpSpPr>
-      <p:grpSpPr>
-        <a:xfrm>
-          <a:off x="0" y="0"/>
-          <a:ext cx="0" cy="0"/>
-          <a:chOff x="0" y="0"/>
-          <a:chExt cx="0" cy="0"/>
-        </a:xfrm>
-      </p:grpSpPr>
-      <p:sp>
-        <p:nvSpPr>
-          <p:cNvPr id="410" name="Google Shape;410;p41"/>
-          <p:cNvSpPr txBox="1">
-            <a:spLocks noGrp="1"/>
-          </p:cNvSpPr>
-          <p:nvPr>
-            <p:ph type="body" idx="1"/>
-          </p:nvPr>
-        </p:nvSpPr>
-        <p:spPr>
-          <a:xfrm>
-            <a:off x="3519054" y="1253836"/>
-            <a:ext cx="8229600" cy="4876800"/>
-          </a:xfrm>
-          <a:prstGeom prst="rect">
-            <a:avLst/>
-          </a:prstGeom>
-          <a:noFill/>
-          <a:ln>
-            <a:noFill/>
-          </a:ln>
-        </p:spPr>
-        <p:txBody>
-          <a:bodyPr spcFirstLastPara="1" vert="horz" wrap="square" lIns="91425" tIns="45700" rIns="91425" bIns="45700" rtlCol="0" anchor="t" anchorCtr="0">
-            <a:noAutofit/>
-          </a:bodyPr>
-          <a:lstStyle/>
-          <a:p>
-            <a:pPr>
-              <a:spcBef>
-                <a:spcPts val="0"/>
-              </a:spcBef>
-              <a:buSzPts val="2040"/>
-              <a:buFont typeface="Arial"/>
-              <a:buChar char="•"/>
-            </a:pPr>
-            <a:r>
-              <a:rPr lang="en-US" sz="2400" dirty="0">
-                <a:ea typeface="Arial"/>
-                <a:cs typeface="Arial"/>
-                <a:sym typeface="Arial"/>
-              </a:rPr>
-              <a:t>Work in small groups or pairs</a:t>
-            </a:r>
-          </a:p>
-          <a:p>
-            <a:pPr>
-              <a:spcBef>
-                <a:spcPts val="0"/>
-              </a:spcBef>
-              <a:buSzPts val="2040"/>
-              <a:buFont typeface="Arial"/>
-              <a:buChar char="•"/>
-            </a:pPr>
-            <a:endParaRPr lang="en-US" sz="2400" dirty="0">
-              <a:ea typeface="Arial"/>
-              <a:cs typeface="Arial"/>
-              <a:sym typeface="Arial"/>
-            </a:endParaRPr>
-          </a:p>
-          <a:p>
-            <a:pPr>
-              <a:spcBef>
-                <a:spcPts val="0"/>
-              </a:spcBef>
-              <a:buSzPts val="2040"/>
-              <a:buFont typeface="Arial"/>
-              <a:buChar char="•"/>
-            </a:pPr>
-            <a:r>
-              <a:rPr lang="en-US" sz="2400" dirty="0">
-                <a:ea typeface="Arial"/>
-                <a:cs typeface="Arial"/>
-                <a:sym typeface="Arial"/>
-              </a:rPr>
-              <a:t>Pick a topic of interest to you </a:t>
-            </a:r>
-          </a:p>
-          <a:p>
-            <a:pPr>
-              <a:spcBef>
-                <a:spcPts val="0"/>
-              </a:spcBef>
-              <a:buSzPts val="2040"/>
-              <a:buFont typeface="Arial"/>
-              <a:buChar char="•"/>
-            </a:pPr>
-            <a:endParaRPr lang="en-US" sz="2400" dirty="0">
-              <a:ea typeface="Arial"/>
-              <a:cs typeface="Arial"/>
-              <a:sym typeface="Arial"/>
-            </a:endParaRPr>
-          </a:p>
-          <a:p>
-            <a:pPr>
-              <a:spcBef>
-                <a:spcPts val="0"/>
-              </a:spcBef>
-              <a:buSzPts val="2040"/>
-              <a:buFont typeface="Arial"/>
-              <a:buChar char="•"/>
-            </a:pPr>
-            <a:r>
-              <a:rPr lang="en-US" sz="2400" dirty="0">
-                <a:ea typeface="Arial"/>
-                <a:cs typeface="Arial"/>
-                <a:sym typeface="Arial"/>
-              </a:rPr>
-              <a:t>Sketch 3 possible narrative visualizations for your topic</a:t>
-            </a:r>
-          </a:p>
-          <a:p>
-            <a:pPr>
-              <a:spcBef>
-                <a:spcPts val="0"/>
-              </a:spcBef>
-              <a:buSzPts val="2040"/>
-              <a:buFont typeface="Arial"/>
-              <a:buChar char="•"/>
-            </a:pPr>
-            <a:endParaRPr lang="en-US" sz="2400" dirty="0">
-              <a:ea typeface="Arial"/>
-              <a:cs typeface="Arial"/>
-              <a:sym typeface="Arial"/>
-            </a:endParaRPr>
-          </a:p>
-          <a:p>
-            <a:pPr lvl="1">
-              <a:spcBef>
-                <a:spcPts val="0"/>
-              </a:spcBef>
-              <a:buSzPts val="2040"/>
-              <a:buFont typeface="Arial"/>
-              <a:buChar char="•"/>
-            </a:pPr>
-            <a:r>
-              <a:rPr lang="en-US" sz="2200" dirty="0">
-                <a:ea typeface="Arial"/>
-                <a:cs typeface="Arial"/>
-                <a:sym typeface="Arial"/>
-              </a:rPr>
-              <a:t>One should be primary author-driven</a:t>
-            </a:r>
-          </a:p>
-          <a:p>
-            <a:pPr lvl="1">
-              <a:spcBef>
-                <a:spcPts val="0"/>
-              </a:spcBef>
-              <a:buSzPts val="2040"/>
-              <a:buFont typeface="Arial"/>
-              <a:buChar char="•"/>
-            </a:pPr>
-            <a:r>
-              <a:rPr lang="en-US" sz="2200" dirty="0">
-                <a:ea typeface="Arial"/>
-                <a:cs typeface="Arial"/>
-                <a:sym typeface="Arial"/>
-              </a:rPr>
-              <a:t>One should be primarily reader-driven</a:t>
-            </a:r>
-          </a:p>
-          <a:p>
-            <a:pPr lvl="1">
-              <a:spcBef>
-                <a:spcPts val="0"/>
-              </a:spcBef>
-              <a:buSzPts val="2040"/>
-              <a:buFont typeface="Arial"/>
-              <a:buChar char="•"/>
-            </a:pPr>
-            <a:r>
-              <a:rPr lang="en-US" sz="2200" dirty="0">
-                <a:ea typeface="Arial"/>
-                <a:cs typeface="Arial"/>
-                <a:sym typeface="Arial"/>
-              </a:rPr>
-              <a:t>And the last should be somewhere between</a:t>
-            </a:r>
-            <a:endParaRPr sz="2200" dirty="0">
-              <a:ea typeface="Arial"/>
-              <a:cs typeface="Arial"/>
-              <a:sym typeface="Arial"/>
-            </a:endParaRPr>
-          </a:p>
-        </p:txBody>
-      </p:sp>
-      <p:sp>
-        <p:nvSpPr>
-          <p:cNvPr id="2" name="Title 1">
-            <a:extLst>
-              <a:ext uri="{FF2B5EF4-FFF2-40B4-BE49-F238E27FC236}">
-                <a16:creationId xmlns:a16="http://schemas.microsoft.com/office/drawing/2014/main" id="{009A9AC3-B035-3A25-CE13-5648E801AD25}"/>
-              </a:ext>
-            </a:extLst>
-          </p:cNvPr>
-          <p:cNvSpPr txBox="1">
-            <a:spLocks/>
-          </p:cNvSpPr>
-          <p:nvPr/>
-        </p:nvSpPr>
-        <p:spPr>
-          <a:xfrm>
-            <a:off x="252919" y="1123837"/>
-            <a:ext cx="2947482" cy="4601183"/>
-          </a:xfrm>
-          <a:prstGeom prst="rect">
-            <a:avLst/>
-          </a:prstGeom>
-        </p:spPr>
-        <p:txBody>
-          <a:bodyPr vert="horz" lIns="91440" tIns="45720" rIns="91440" bIns="45720" rtlCol="0" anchor="ctr">
-            <a:normAutofit/>
-          </a:bodyPr>
-          <a:lstStyle>
-            <a:lvl1pPr algn="l" defTabSz="914400" rtl="0" eaLnBrk="1" latinLnBrk="0" hangingPunct="1">
-              <a:lnSpc>
-                <a:spcPct val="90000"/>
-              </a:lnSpc>
-              <a:spcBef>
-                <a:spcPct val="0"/>
-              </a:spcBef>
-              <a:buNone/>
-              <a:defRPr sz="3600" kern="1200" spc="-60" baseline="0">
-                <a:solidFill>
-                  <a:srgbClr val="FFFFFF"/>
-                </a:solidFill>
-                <a:latin typeface="+mj-lt"/>
-                <a:ea typeface="+mj-ea"/>
-                <a:cs typeface="+mj-cs"/>
-              </a:defRPr>
-            </a:lvl1pPr>
-          </a:lstStyle>
-          <a:p>
-            <a:r>
-              <a:rPr lang="en-US" dirty="0"/>
-              <a:t>Practice</a:t>
-            </a:r>
-          </a:p>
-        </p:txBody>
-      </p:sp>
-    </p:spTree>
-  </p:cSld>
-  <p:clrMapOvr>
-    <a:masterClrMapping/>
-  </p:clrMapOvr>
-</p:sld>
-</file>
-
-<file path=ppt/slides/slide4.xml><?xml version="1.0" encoding="utf-8"?>
+<file path=ppt/slides/slide5.xml><?xml version="1.0" encoding="utf-8"?>
 <p:sld xmlns:a="http://schemas.openxmlformats.org/drawingml/2006/main" xmlns:r="http://schemas.openxmlformats.org/officeDocument/2006/relationships" xmlns:p="http://schemas.openxmlformats.org/presentationml/2006/main">
   <p:cSld>
     <p:spTree>
@@ -19096,7 +19405,7 @@
 </p:sld>
 </file>
 
-<file path=ppt/slides/slide5.xml><?xml version="1.0" encoding="utf-8"?>
+<file path=ppt/slides/slide6.xml><?xml version="1.0" encoding="utf-8"?>
 <p:sld xmlns:a="http://schemas.openxmlformats.org/drawingml/2006/main" xmlns:r="http://schemas.openxmlformats.org/officeDocument/2006/relationships" xmlns:p="http://schemas.openxmlformats.org/presentationml/2006/main">
   <p:cSld>
     <p:spTree>
@@ -19269,7 +19578,7 @@
 </p:sld>
 </file>
 
-<file path=ppt/slides/slide6.xml><?xml version="1.0" encoding="utf-8"?>
+<file path=ppt/slides/slide7.xml><?xml version="1.0" encoding="utf-8"?>
 <p:sld xmlns:a="http://schemas.openxmlformats.org/drawingml/2006/main" xmlns:r="http://schemas.openxmlformats.org/officeDocument/2006/relationships" xmlns:p="http://schemas.openxmlformats.org/presentationml/2006/main">
   <p:cSld>
     <p:spTree>
@@ -19977,7 +20286,7 @@
 </p:sld>
 </file>
 
-<file path=ppt/slides/slide7.xml><?xml version="1.0" encoding="utf-8"?>
+<file path=ppt/slides/slide8.xml><?xml version="1.0" encoding="utf-8"?>
 <p:sld xmlns:a="http://schemas.openxmlformats.org/drawingml/2006/main" xmlns:r="http://schemas.openxmlformats.org/officeDocument/2006/relationships" xmlns:p="http://schemas.openxmlformats.org/presentationml/2006/main">
   <p:cSld>
     <p:spTree>
@@ -20056,7 +20365,7 @@
 </p:sld>
 </file>
 
-<file path=ppt/slides/slide8.xml><?xml version="1.0" encoding="utf-8"?>
+<file path=ppt/slides/slide9.xml><?xml version="1.0" encoding="utf-8"?>
 <p:sld xmlns:a="http://schemas.openxmlformats.org/drawingml/2006/main" xmlns:r="http://schemas.openxmlformats.org/officeDocument/2006/relationships" xmlns:p="http://schemas.openxmlformats.org/presentationml/2006/main">
   <p:cSld>
     <p:spTree>
@@ -20143,231 +20452,6 @@
         <p:spPr>
           <a:xfrm>
             <a:off x="9254836" y="2114437"/>
-            <a:ext cx="914400" cy="914400"/>
-          </a:xfrm>
-          <a:prstGeom prst="rect">
-            <a:avLst/>
-          </a:prstGeom>
-          <a:noFill/>
-          <a:ln>
-            <a:noFill/>
-          </a:ln>
-        </p:spPr>
-      </p:pic>
-    </p:spTree>
-  </p:cSld>
-  <p:clrMapOvr>
-    <a:masterClrMapping/>
-  </p:clrMapOvr>
-</p:sld>
-</file>
-
-<file path=ppt/slides/slide9.xml><?xml version="1.0" encoding="utf-8"?>
-<p:sld xmlns:a="http://schemas.openxmlformats.org/drawingml/2006/main" xmlns:r="http://schemas.openxmlformats.org/officeDocument/2006/relationships" xmlns:p="http://schemas.openxmlformats.org/presentationml/2006/main">
-  <p:cSld>
-    <p:spTree>
-      <p:nvGrpSpPr>
-        <p:cNvPr id="1" name="Shape 199"/>
-        <p:cNvGrpSpPr/>
-        <p:nvPr/>
-      </p:nvGrpSpPr>
-      <p:grpSpPr>
-        <a:xfrm>
-          <a:off x="0" y="0"/>
-          <a:ext cx="0" cy="0"/>
-          <a:chOff x="0" y="0"/>
-          <a:chExt cx="0" cy="0"/>
-        </a:xfrm>
-      </p:grpSpPr>
-      <p:pic>
-        <p:nvPicPr>
-          <p:cNvPr id="200" name="Google Shape;200;p26"/>
-          <p:cNvPicPr preferRelativeResize="0"/>
-          <p:nvPr/>
-        </p:nvPicPr>
-        <p:blipFill rotWithShape="1">
-          <a:blip r:embed="rId3">
-            <a:alphaModFix/>
-          </a:blip>
-          <a:srcRect/>
-          <a:stretch/>
-        </p:blipFill>
-        <p:spPr>
-          <a:xfrm>
-            <a:off x="4446913" y="1706440"/>
-            <a:ext cx="2279613" cy="4279274"/>
-          </a:xfrm>
-          <a:prstGeom prst="rect">
-            <a:avLst/>
-          </a:prstGeom>
-          <a:noFill/>
-          <a:ln>
-            <a:noFill/>
-          </a:ln>
-        </p:spPr>
-      </p:pic>
-      <p:pic>
-        <p:nvPicPr>
-          <p:cNvPr id="201" name="Google Shape;201;p26"/>
-          <p:cNvPicPr preferRelativeResize="0"/>
-          <p:nvPr/>
-        </p:nvPicPr>
-        <p:blipFill rotWithShape="1">
-          <a:blip r:embed="rId4">
-            <a:alphaModFix/>
-          </a:blip>
-          <a:srcRect/>
-          <a:stretch/>
-        </p:blipFill>
-        <p:spPr>
-          <a:xfrm>
-            <a:off x="7655143" y="1503219"/>
-            <a:ext cx="2053254" cy="4724400"/>
-          </a:xfrm>
-          <a:prstGeom prst="rect">
-            <a:avLst/>
-          </a:prstGeom>
-          <a:noFill/>
-          <a:ln>
-            <a:noFill/>
-          </a:ln>
-        </p:spPr>
-      </p:pic>
-      <p:sp>
-        <p:nvSpPr>
-          <p:cNvPr id="202" name="Google Shape;202;p26"/>
-          <p:cNvSpPr/>
-          <p:nvPr/>
-        </p:nvSpPr>
-        <p:spPr>
-          <a:xfrm>
-            <a:off x="4946295" y="281196"/>
-            <a:ext cx="3023809" cy="1320800"/>
-          </a:xfrm>
-          <a:prstGeom prst="wedgeEllipseCallout">
-            <a:avLst>
-              <a:gd name="adj1" fmla="val -17979"/>
-              <a:gd name="adj2" fmla="val 74635"/>
-            </a:avLst>
-          </a:prstGeom>
-          <a:solidFill>
-            <a:schemeClr val="lt1"/>
-          </a:solidFill>
-          <a:ln w="25400" cap="flat" cmpd="sng">
-            <a:solidFill>
-              <a:schemeClr val="dk1"/>
-            </a:solidFill>
-            <a:prstDash val="solid"/>
-            <a:round/>
-            <a:headEnd type="none" w="sm" len="sm"/>
-            <a:tailEnd type="none" w="sm" len="sm"/>
-          </a:ln>
-        </p:spPr>
-        <p:txBody>
-          <a:bodyPr spcFirstLastPara="1" wrap="square" lIns="91425" tIns="91425" rIns="91425" bIns="91425" anchor="ctr" anchorCtr="0">
-            <a:noAutofit/>
-          </a:bodyPr>
-          <a:lstStyle/>
-          <a:p>
-            <a:endParaRPr/>
-          </a:p>
-        </p:txBody>
-      </p:sp>
-      <p:sp>
-        <p:nvSpPr>
-          <p:cNvPr id="203" name="Google Shape;203;p26"/>
-          <p:cNvSpPr txBox="1"/>
-          <p:nvPr/>
-        </p:nvSpPr>
-        <p:spPr>
-          <a:xfrm>
-            <a:off x="5518954" y="526097"/>
-            <a:ext cx="1878489" cy="830997"/>
-          </a:xfrm>
-          <a:prstGeom prst="rect">
-            <a:avLst/>
-          </a:prstGeom>
-          <a:noFill/>
-          <a:ln>
-            <a:noFill/>
-          </a:ln>
-        </p:spPr>
-        <p:txBody>
-          <a:bodyPr spcFirstLastPara="1" wrap="square" lIns="91425" tIns="45700" rIns="91425" bIns="45700" anchor="t" anchorCtr="0">
-            <a:noAutofit/>
-          </a:bodyPr>
-          <a:lstStyle/>
-          <a:p>
-            <a:pPr algn="ctr"/>
-            <a:r>
-              <a:rPr lang="en-US" sz="2400" dirty="0">
-                <a:solidFill>
-                  <a:schemeClr val="tx1">
-                    <a:lumMod val="75000"/>
-                    <a:lumOff val="25000"/>
-                  </a:schemeClr>
-                </a:solidFill>
-                <a:ea typeface="Arial"/>
-                <a:cs typeface="Arial"/>
-                <a:sym typeface="Arial"/>
-              </a:rPr>
-              <a:t>What is that </a:t>
-            </a:r>
-            <a:endParaRPr sz="2400" dirty="0">
-              <a:solidFill>
-                <a:schemeClr val="tx1">
-                  <a:lumMod val="75000"/>
-                  <a:lumOff val="25000"/>
-                </a:schemeClr>
-              </a:solidFill>
-            </a:endParaRPr>
-          </a:p>
-          <a:p>
-            <a:pPr algn="ctr"/>
-            <a:r>
-              <a:rPr lang="en-US" sz="2400" dirty="0">
-                <a:solidFill>
-                  <a:schemeClr val="tx1">
-                    <a:lumMod val="75000"/>
-                    <a:lumOff val="25000"/>
-                  </a:schemeClr>
-                </a:solidFill>
-                <a:ea typeface="Arial"/>
-                <a:cs typeface="Arial"/>
-                <a:sym typeface="Arial"/>
-              </a:rPr>
-              <a:t>story about?</a:t>
-            </a:r>
-            <a:endParaRPr sz="2400" dirty="0">
-              <a:solidFill>
-                <a:schemeClr val="tx1">
-                  <a:lumMod val="75000"/>
-                  <a:lumOff val="25000"/>
-                </a:schemeClr>
-              </a:solidFill>
-              <a:ea typeface="Arial"/>
-              <a:cs typeface="Arial"/>
-              <a:sym typeface="Arial"/>
-            </a:endParaRPr>
-          </a:p>
-        </p:txBody>
-      </p:sp>
-      <p:pic>
-        <p:nvPicPr>
-          <p:cNvPr id="204" name="Google Shape;204;p26"/>
-          <p:cNvPicPr preferRelativeResize="0"/>
-          <p:nvPr/>
-        </p:nvPicPr>
-        <p:blipFill rotWithShape="1">
-          <a:blip r:embed="rId5">
-            <a:alphaModFix/>
-          </a:blip>
-          <a:srcRect/>
-          <a:stretch/>
-        </p:blipFill>
-        <p:spPr>
-          <a:xfrm>
-            <a:off x="9310255" y="2493819"/>
             <a:ext cx="914400" cy="914400"/>
           </a:xfrm>
           <a:prstGeom prst="rect">
